--- a/MIRAGE_Junior_Project_Presentation.pptx
+++ b/MIRAGE_Junior_Project_Presentation.pptx
@@ -13,12 +13,6 @@
     <p:sldId id="261" r:id="rId12"/>
     <p:sldId id="262" r:id="rId13"/>
     <p:sldId id="263" r:id="rId14"/>
-    <p:sldId id="264" r:id="rId15"/>
-    <p:sldId id="265" r:id="rId16"/>
-    <p:sldId id="266" r:id="rId17"/>
-    <p:sldId id="267" r:id="rId18"/>
-    <p:sldId id="268" r:id="rId19"/>
-    <p:sldId id="269" r:id="rId20"/>
   </p:sldIdLst>
   <p:sldSz cx="12191695" cy="6858000" type="screen4x3"/>
   <p:notesSz cx="6858000" cy="9144000"/>
@@ -3116,7 +3110,7 @@
             <a:avLst/>
           </a:prstGeom>
           <a:solidFill>
-            <a:srgbClr val="0D1117"/>
+            <a:srgbClr val="090D16"/>
           </a:solidFill>
           <a:ln>
             <a:noFill/>
@@ -3146,24 +3140,92 @@
       </p:sp>
       <p:sp>
         <p:nvSpPr>
-          <p:cNvPr id="3" name="Rounded Rectangle 2"/>
+          <p:cNvPr id="3" name="TextBox 2"/>
+          <p:cNvSpPr txBox="1"/>
+          <p:nvPr/>
+        </p:nvSpPr>
+        <p:spPr>
+          <a:xfrm>
+            <a:off x="731520" y="914400"/>
+            <a:ext cx="10728655" cy="2926080"/>
+          </a:xfrm>
+          <a:prstGeom prst="rect">
+            <a:avLst/>
+          </a:prstGeom>
+          <a:noFill/>
+        </p:spPr>
+        <p:txBody>
+          <a:bodyPr wrap="square">
+            <a:spAutoFit/>
+          </a:bodyPr>
+          <a:lstStyle/>
+          <a:p>
+            <a:pPr>
+              <a:spcAft>
+                <a:spcPts val="1200"/>
+              </a:spcAft>
+              <a:defRPr sz="1200" b="1">
+                <a:solidFill>
+                  <a:srgbClr val="00D4FF"/>
+                </a:solidFill>
+              </a:defRPr>
+            </a:pPr>
+            <a:r>
+              <a:t>ACADEMIC CAPSTONE DEFENSE   •   B.TECH CYBER SECURITY</a:t>
+            </a:r>
+          </a:p>
+          <a:p>
+            <a:pPr>
+              <a:spcAft>
+                <a:spcPts val="800"/>
+              </a:spcAft>
+              <a:defRPr sz="3600" b="1">
+                <a:solidFill>
+                  <a:srgbClr val="F0F6FC"/>
+                </a:solidFill>
+              </a:defRPr>
+            </a:pPr>
+            <a:r>
+              <a:t>MIRAGE Junior: Intelligent Deception Grid</a:t>
+            </a:r>
+          </a:p>
+          <a:p>
+            <a:pPr>
+              <a:spcAft>
+                <a:spcPts val="2000"/>
+              </a:spcAft>
+              <a:defRPr sz="1600">
+                <a:solidFill>
+                  <a:srgbClr val="94A3B8"/>
+                </a:solidFill>
+              </a:defRPr>
+            </a:pPr>
+            <a:r>
+              <a:t>Next-Generation Autonomous Honeypot Network with Real-Time Behavioral Threat Scoring, Dynamic 25-Point Firewall Isolation &amp; Instant Telegram Alerts</a:t>
+            </a:r>
+          </a:p>
+        </p:txBody>
+      </p:sp>
+      <p:sp>
+        <p:nvSpPr>
+          <p:cNvPr id="4" name="Rounded Rectangle 3"/>
           <p:cNvSpPr/>
           <p:nvPr/>
         </p:nvSpPr>
         <p:spPr>
           <a:xfrm>
-            <a:off x="1097280" y="1097280"/>
-            <a:ext cx="9966960" cy="4663440"/>
+            <a:off x="731520" y="4114800"/>
+            <a:ext cx="3328416" cy="2103120"/>
           </a:xfrm>
           <a:prstGeom prst="roundRect">
             <a:avLst/>
           </a:prstGeom>
           <a:solidFill>
-            <a:srgbClr val="161B22"/>
+            <a:srgbClr val="121826"/>
           </a:solidFill>
-          <a:ln w="25400">
+          <a:ln w="12700">
             <a:solidFill>
-              <a:srgbClr val="00D4FF"/>
+              <a:srgbClr val="1E293B"/>
             </a:solidFill>
           </a:ln>
         </p:spPr>
@@ -3191,14 +3253,14 @@
       </p:sp>
       <p:sp>
         <p:nvSpPr>
-          <p:cNvPr id="4" name="TextBox 3"/>
+          <p:cNvPr id="5" name="TextBox 4"/>
           <p:cNvSpPr txBox="1"/>
           <p:nvPr/>
         </p:nvSpPr>
         <p:spPr>
           <a:xfrm>
-            <a:off x="1645920" y="1645920"/>
-            <a:ext cx="8869680" cy="3657600"/>
+            <a:off x="914400" y="4251960"/>
+            <a:ext cx="2962656" cy="1828800"/>
           </a:xfrm>
           <a:prstGeom prst="rect">
             <a:avLst/>
@@ -3213,118 +3275,66 @@
           <a:p>
             <a:pPr>
               <a:spcAft>
-                <a:spcPts val="1400"/>
+                <a:spcPts val="1000"/>
               </a:spcAft>
-              <a:defRPr sz="1200" b="1">
-                <a:solidFill>
-                  <a:srgbClr val="00FF41"/>
-                </a:solidFill>
-              </a:defRPr>
-            </a:pPr>
-            <a:r>
-              <a:t>ACADEMIC CAPSTONE PROJECT • 3RD YEAR CYBER SECURITY</a:t>
-            </a:r>
-          </a:p>
-          <a:p>
-            <a:pPr>
-              <a:spcAft>
-                <a:spcPts val="800"/>
-              </a:spcAft>
-              <a:defRPr sz="4400" b="1">
-                <a:solidFill>
-                  <a:srgbClr val="F0F6FC"/>
-                </a:solidFill>
-              </a:defRPr>
-            </a:pPr>
-            <a:r>
-              <a:t>🛡️ MIRAGE Junior</a:t>
-            </a:r>
-          </a:p>
-          <a:p>
-            <a:pPr>
-              <a:spcAft>
-                <a:spcPts val="3600"/>
-              </a:spcAft>
-              <a:defRPr sz="2000">
+              <a:defRPr sz="1500" b="1">
                 <a:solidFill>
                   <a:srgbClr val="00D4FF"/>
                 </a:solidFill>
               </a:defRPr>
             </a:pPr>
             <a:r>
-              <a:t>Intelligent Deception Network with Real-Time Threat Scoring &amp; Auto-Quarantine</a:t>
-            </a:r>
-          </a:p>
-          <a:p>
-            <a:pPr>
-              <a:spcAft>
-                <a:spcPts val="1600"/>
-              </a:spcAft>
-              <a:defRPr sz="1400">
-                <a:solidFill>
-                  <a:srgbClr val="8B949E"/>
-                </a:solidFill>
-              </a:defRPr>
-            </a:pPr>
-            <a:r>
-              <a:t>👤 Team Leader: Jaskaran Bandral  (Backend &amp; Core Intelligence Engine)</a:t>
+              <a:t>Project Lead</a:t>
+            </a:r>
+          </a:p>
+          <a:p>
+            <a:pPr>
+              <a:defRPr sz="1300">
+                <a:solidFill>
+                  <a:srgbClr val="94A3B8"/>
+                </a:solidFill>
+              </a:defRPr>
+            </a:pPr>
+            <a:r>
+              <a:t>Jaskaran Bandral</a:t>
             </a:r>
             <a:br/>
             <a:r>
-              <a:t>👤 Teammate: Relish Sharma  (SOC Analytics Dashboard &amp; Cloud Deployment)</a:t>
-            </a:r>
-          </a:p>
-          <a:p>
-            <a:pPr>
-              <a:defRPr sz="1300" b="1">
-                <a:solidFill>
-                  <a:srgbClr val="00FF41"/>
-                </a:solidFill>
-              </a:defRPr>
-            </a:pPr>
-            <a:r>
-              <a:t>🌐 Live System: https://mirage-junior.vercel.app  •  Oct 2026</a:t>
-            </a:r>
-          </a:p>
-        </p:txBody>
-      </p:sp>
-    </p:spTree>
-  </p:cSld>
-  <p:clrMapOvr>
-    <a:masterClrMapping/>
-  </p:clrMapOvr>
-</p:sld>
-</file>
-
-<file path=ppt/slides/slide10.xml><?xml version="1.0" encoding="utf-8"?>
-<p:sld xmlns:a="http://schemas.openxmlformats.org/drawingml/2006/main" xmlns:p="http://schemas.openxmlformats.org/presentationml/2006/main" xmlns:r="http://schemas.openxmlformats.org/officeDocument/2006/relationships">
-  <p:cSld>
-    <p:spTree>
-      <p:nvGrpSpPr>
-        <p:cNvPr id="1" name=""/>
-        <p:cNvGrpSpPr/>
-        <p:nvPr/>
-      </p:nvGrpSpPr>
-      <p:grpSpPr/>
-      <p:sp>
-        <p:nvSpPr>
-          <p:cNvPr id="2" name="Rectangle 1"/>
+              <a:t>@Jaskaranbandral-07</a:t>
+            </a:r>
+            <a:br/>
+            <a:br/>
+            <a:r>
+              <a:t>• Core Architecture &amp; Engines</a:t>
+            </a:r>
+            <a:br/>
+            <a:r>
+              <a:t>• Scoring &amp; Dynamic Quarantine</a:t>
+            </a:r>
+          </a:p>
+        </p:txBody>
+      </p:sp>
+      <p:sp>
+        <p:nvSpPr>
+          <p:cNvPr id="6" name="Rounded Rectangle 5"/>
           <p:cNvSpPr/>
           <p:nvPr/>
         </p:nvSpPr>
         <p:spPr>
           <a:xfrm>
-            <a:off x="0" y="0"/>
-            <a:ext cx="12191695" cy="6858000"/>
-          </a:xfrm>
-          <a:prstGeom prst="rect">
+            <a:off x="4425696" y="4114800"/>
+            <a:ext cx="3328416" cy="2103120"/>
+          </a:xfrm>
+          <a:prstGeom prst="roundRect">
             <a:avLst/>
           </a:prstGeom>
           <a:solidFill>
-            <a:srgbClr val="0D1117"/>
+            <a:srgbClr val="121826"/>
           </a:solidFill>
-          <a:ln>
-            <a:noFill/>
+          <a:ln w="12700">
+            <a:solidFill>
+              <a:srgbClr val="1E293B"/>
+            </a:solidFill>
           </a:ln>
         </p:spPr>
         <p:style>
@@ -3351,14 +3361,14 @@
       </p:sp>
       <p:sp>
         <p:nvSpPr>
-          <p:cNvPr id="3" name="TextBox 2"/>
+          <p:cNvPr id="7" name="TextBox 6"/>
           <p:cNvSpPr txBox="1"/>
           <p:nvPr/>
         </p:nvSpPr>
         <p:spPr>
           <a:xfrm>
-            <a:off x="731520" y="365760"/>
-            <a:ext cx="10698480" cy="365760"/>
+            <a:off x="4608576" y="4251960"/>
+            <a:ext cx="2962656" cy="1828800"/>
           </a:xfrm>
           <a:prstGeom prst="rect">
             <a:avLst/>
@@ -3372,73 +3382,66 @@
           <a:lstStyle/>
           <a:p>
             <a:pPr>
-              <a:defRPr sz="1100" b="1">
-                <a:solidFill>
-                  <a:srgbClr val="00D4FF"/>
-                </a:solidFill>
-              </a:defRPr>
-            </a:pPr>
-            <a:r>
-              <a:t>09 / WEB DASHBOARD</a:t>
-            </a:r>
-          </a:p>
-        </p:txBody>
-      </p:sp>
-      <p:sp>
-        <p:nvSpPr>
-          <p:cNvPr id="4" name="TextBox 3"/>
-          <p:cNvSpPr txBox="1"/>
-          <p:nvPr/>
-        </p:nvSpPr>
-        <p:spPr>
-          <a:xfrm>
-            <a:off x="731520" y="685800"/>
-            <a:ext cx="10698480" cy="731520"/>
-          </a:xfrm>
-          <a:prstGeom prst="rect">
-            <a:avLst/>
-          </a:prstGeom>
-          <a:noFill/>
-        </p:spPr>
-        <p:txBody>
-          <a:bodyPr wrap="square">
-            <a:spAutoFit/>
-          </a:bodyPr>
-          <a:lstStyle/>
-          <a:p>
-            <a:pPr>
-              <a:defRPr sz="2600" b="1">
-                <a:solidFill>
-                  <a:srgbClr val="F0F6FC"/>
-                </a:solidFill>
-              </a:defRPr>
-            </a:pPr>
-            <a:r>
-              <a:t>Real-Time SOC Analytics Dashboard Showcase</a:t>
-            </a:r>
-          </a:p>
-        </p:txBody>
-      </p:sp>
-      <p:sp>
-        <p:nvSpPr>
-          <p:cNvPr id="5" name="Rounded Rectangle 4"/>
+              <a:spcAft>
+                <a:spcPts val="1000"/>
+              </a:spcAft>
+              <a:defRPr sz="1500" b="1">
+                <a:solidFill>
+                  <a:srgbClr val="00FF88"/>
+                </a:solidFill>
+              </a:defRPr>
+            </a:pPr>
+            <a:r>
+              <a:t>Co-Developer</a:t>
+            </a:r>
+          </a:p>
+          <a:p>
+            <a:pPr>
+              <a:defRPr sz="1300">
+                <a:solidFill>
+                  <a:srgbClr val="94A3B8"/>
+                </a:solidFill>
+              </a:defRPr>
+            </a:pPr>
+            <a:r>
+              <a:t>Relish Sharma</a:t>
+            </a:r>
+            <a:br/>
+            <a:r>
+              <a:t>@2024A7R009</a:t>
+            </a:r>
+            <a:br/>
+            <a:br/>
+            <a:r>
+              <a:t>• Frontend &amp; Lucide UI</a:t>
+            </a:r>
+            <a:br/>
+            <a:r>
+              <a:t>• Telemetry &amp; System Validation</a:t>
+            </a:r>
+          </a:p>
+        </p:txBody>
+      </p:sp>
+      <p:sp>
+        <p:nvSpPr>
+          <p:cNvPr id="8" name="Rounded Rectangle 7"/>
           <p:cNvSpPr/>
           <p:nvPr/>
         </p:nvSpPr>
         <p:spPr>
           <a:xfrm>
-            <a:off x="731520" y="1645920"/>
-            <a:ext cx="5120640" cy="4572000"/>
+            <a:off x="8119872" y="4114800"/>
+            <a:ext cx="3328416" cy="2103120"/>
           </a:xfrm>
           <a:prstGeom prst="roundRect">
             <a:avLst/>
           </a:prstGeom>
           <a:solidFill>
-            <a:srgbClr val="161B22"/>
+            <a:srgbClr val="121826"/>
           </a:solidFill>
-          <a:ln w="19050">
+          <a:ln w="12700">
             <a:solidFill>
-              <a:srgbClr val="00FF41"/>
+              <a:srgbClr val="1E293B"/>
             </a:solidFill>
           </a:ln>
         </p:spPr>
@@ -3466,14 +3469,14 @@
       </p:sp>
       <p:sp>
         <p:nvSpPr>
-          <p:cNvPr id="6" name="TextBox 5"/>
+          <p:cNvPr id="9" name="TextBox 8"/>
           <p:cNvSpPr txBox="1"/>
           <p:nvPr/>
         </p:nvSpPr>
         <p:spPr>
           <a:xfrm>
-            <a:off x="960120" y="1828800"/>
-            <a:ext cx="4663440" cy="4206240"/>
+            <a:off x="8302752" y="4251960"/>
+            <a:ext cx="2962656" cy="1828800"/>
           </a:xfrm>
           <a:prstGeom prst="rect">
             <a:avLst/>
@@ -3488,1931 +3491,41 @@
           <a:p>
             <a:pPr>
               <a:spcAft>
-                <a:spcPts val="1200"/>
+                <a:spcPts val="1000"/>
               </a:spcAft>
-              <a:defRPr sz="1800" b="1">
-                <a:solidFill>
-                  <a:srgbClr val="00FF41"/>
-                </a:solidFill>
-              </a:defRPr>
-            </a:pPr>
-            <a:r>
-              <a:t>Core Views &amp; Capabilities</a:t>
-            </a:r>
-          </a:p>
-          <a:p>
-            <a:pPr>
-              <a:spcAft>
-                <a:spcPts val="800"/>
-              </a:spcAft>
+              <a:defRPr sz="1500" b="1">
+                <a:solidFill>
+                  <a:srgbClr val="A855F7"/>
+                </a:solidFill>
+              </a:defRPr>
+            </a:pPr>
+            <a:r>
+              <a:t>Live Production</a:t>
+            </a:r>
+          </a:p>
+          <a:p>
+            <a:pPr>
               <a:defRPr sz="1300">
                 <a:solidFill>
-                  <a:srgbClr val="F0F6FC"/>
-                </a:solidFill>
-              </a:defRPr>
-            </a:pPr>
-            <a:r>
-              <a:t>📊 Command Overview (`/`): Stat cards, threat distribution doughnut, top countries bar chart, and 5s auto-refresh.</a:t>
-            </a:r>
-          </a:p>
-          <a:p>
-            <a:pPr>
-              <a:spcAft>
-                <a:spcPts val="800"/>
-              </a:spcAft>
-              <a:defRPr sz="1300">
-                <a:solidFill>
-                  <a:srgbClr val="F0F6FC"/>
-                </a:solidFill>
-              </a:defRPr>
-            </a:pPr>
-            <a:r>
-              <a:t>📄 Full Attack Log (`/attacks`): Clean 10-records-per-page pagination with protocol filter pills and CSV export.</a:t>
-            </a:r>
-          </a:p>
-          <a:p>
-            <a:pPr>
-              <a:spcAft>
-                <a:spcPts val="800"/>
-              </a:spcAft>
-              <a:defRPr sz="1300">
-                <a:solidFill>
-                  <a:srgbClr val="F0F6FC"/>
-                </a:solidFill>
-              </a:defRPr>
-            </a:pPr>
-            <a:r>
-              <a:t>🎯 Attacker Dossier (`/attacker/&lt;ip&gt;`): Deep-dive geolocation profile, captured credentials, and quarantine logs.</a:t>
-            </a:r>
-          </a:p>
-          <a:p>
-            <a:pPr>
-              <a:spcAft>
-                <a:spcPts val="800"/>
-              </a:spcAft>
-              <a:defRPr sz="1300">
-                <a:solidFill>
-                  <a:srgbClr val="F0F6FC"/>
-                </a:solidFill>
-              </a:defRPr>
-            </a:pPr>
-            <a:r>
-              <a:t>🛡️ Quarantine Manager (`/quarantine`): Live active blocks and one-click unblock actions.</a:t>
-            </a:r>
-          </a:p>
-          <a:p>
-            <a:pPr>
-              <a:spcAft>
-                <a:spcPts val="800"/>
-              </a:spcAft>
-              <a:defRPr sz="1300">
-                <a:solidFill>
-                  <a:srgbClr val="F0F6FC"/>
-                </a:solidFill>
-              </a:defRPr>
-            </a:pPr>
-            <a:r>
-              <a:t>⚙️ System Settings (`/settings`): Live configuration panel for Telegram credentials and quarantine threshold.</a:t>
-            </a:r>
-          </a:p>
-        </p:txBody>
-      </p:sp>
-      <p:sp>
-        <p:nvSpPr>
-          <p:cNvPr id="7" name="Rounded Rectangle 6"/>
-          <p:cNvSpPr/>
-          <p:nvPr/>
-        </p:nvSpPr>
-        <p:spPr>
-          <a:xfrm>
-            <a:off x="6217920" y="1645920"/>
-            <a:ext cx="5212080" cy="4572000"/>
-          </a:xfrm>
-          <a:prstGeom prst="roundRect">
-            <a:avLst/>
-          </a:prstGeom>
-          <a:solidFill>
-            <a:srgbClr val="161B22"/>
-          </a:solidFill>
-          <a:ln w="19050">
-            <a:solidFill>
-              <a:srgbClr val="00D4FF"/>
-            </a:solidFill>
-          </a:ln>
-        </p:spPr>
-        <p:style>
-          <a:lnRef idx="1">
-            <a:schemeClr val="accent1"/>
-          </a:lnRef>
-          <a:fillRef idx="3">
-            <a:schemeClr val="accent1"/>
-          </a:fillRef>
-          <a:effectRef idx="2">
-            <a:schemeClr val="accent1"/>
-          </a:effectRef>
-          <a:fontRef idx="minor">
-            <a:schemeClr val="lt1"/>
-          </a:fontRef>
-        </p:style>
-        <p:txBody>
-          <a:bodyPr rtlCol="0" anchor="ctr"/>
-          <a:lstStyle/>
-          <a:p>
-            <a:pPr algn="ctr"/>
-          </a:p>
-        </p:txBody>
-      </p:sp>
-      <p:sp>
-        <p:nvSpPr>
-          <p:cNvPr id="8" name="TextBox 7"/>
-          <p:cNvSpPr txBox="1"/>
-          <p:nvPr/>
-        </p:nvSpPr>
-        <p:spPr>
-          <a:xfrm>
-            <a:off x="6446520" y="1828800"/>
-            <a:ext cx="4754880" cy="4206240"/>
-          </a:xfrm>
-          <a:prstGeom prst="rect">
-            <a:avLst/>
-          </a:prstGeom>
-          <a:noFill/>
-        </p:spPr>
-        <p:txBody>
-          <a:bodyPr wrap="square">
-            <a:spAutoFit/>
-          </a:bodyPr>
-          <a:lstStyle/>
-          <a:p>
-            <a:pPr>
-              <a:spcAft>
-                <a:spcPts val="1200"/>
-              </a:spcAft>
-              <a:defRPr sz="1800" b="1">
-                <a:solidFill>
-                  <a:srgbClr val="00D4FF"/>
-                </a:solidFill>
-              </a:defRPr>
-            </a:pPr>
-            <a:r>
-              <a:t>Attack Timeline Replay (`timeline.js`)</a:t>
-            </a:r>
-          </a:p>
-          <a:p>
-            <a:pPr>
-              <a:spcAft>
-                <a:spcPts val="800"/>
-              </a:spcAft>
-              <a:defRPr sz="1300">
-                <a:solidFill>
-                  <a:srgbClr val="F0F6FC"/>
-                </a:solidFill>
-              </a:defRPr>
-            </a:pPr>
-            <a:r>
-              <a:t>🎬 Visual Narrative Replay:</a:t>
-            </a:r>
-          </a:p>
-          <a:p>
-            <a:pPr>
-              <a:spcAft>
-                <a:spcPts val="800"/>
-              </a:spcAft>
-              <a:defRPr sz="1300">
-                <a:solidFill>
-                  <a:srgbClr val="F0F6FC"/>
-                </a:solidFill>
-              </a:defRPr>
-            </a:pPr>
-            <a:r>
-              <a:t>   Renders the attacker's actions chronologically from initial probe to final quarantine.</a:t>
-            </a:r>
-          </a:p>
-          <a:p>
-            <a:pPr>
-              <a:spcAft>
-                <a:spcPts val="800"/>
-              </a:spcAft>
-              <a:defRPr sz="1300">
-                <a:solidFill>
-                  <a:srgbClr val="F0F6FC"/>
-                </a:solidFill>
-              </a:defRPr>
-            </a:pPr>
-            <a:r>
-              <a:t>📈 Cumulative Score Tracking:</a:t>
-            </a:r>
-          </a:p>
-          <a:p>
-            <a:pPr>
-              <a:spcAft>
-                <a:spcPts val="800"/>
-              </a:spcAft>
-              <a:defRPr sz="1300">
-                <a:solidFill>
-                  <a:srgbClr val="F0F6FC"/>
-                </a:solidFill>
-              </a:defRPr>
-            </a:pPr>
-            <a:r>
-              <a:t>   Calculates running risk total with color-coded nodes (Green ➔ Yellow ➔ Orange ➔ Pulsing Red).</a:t>
-            </a:r>
-          </a:p>
-          <a:p>
-            <a:pPr>
-              <a:spcAft>
-                <a:spcPts val="800"/>
-              </a:spcAft>
-              <a:defRPr sz="1300">
-                <a:solidFill>
-                  <a:srgbClr val="F0F6FC"/>
-                </a:solidFill>
-              </a:defRPr>
-            </a:pPr>
-            <a:r>
-              <a:t>🏷️ MITRE Tagging Integration:</a:t>
-            </a:r>
-          </a:p>
-          <a:p>
-            <a:pPr>
-              <a:spcAft>
-                <a:spcPts val="800"/>
-              </a:spcAft>
-              <a:defRPr sz="1300">
-                <a:solidFill>
-                  <a:srgbClr val="F0F6FC"/>
-                </a:solidFill>
-              </a:defRPr>
-            </a:pPr>
-            <a:r>
-              <a:t>   Displays the exact MITRE ATT&amp;CK technique pill alongside each event.</a:t>
-            </a:r>
-          </a:p>
-          <a:p>
-            <a:pPr>
-              <a:spcAft>
-                <a:spcPts val="800"/>
-              </a:spcAft>
-              <a:defRPr sz="1300">
-                <a:solidFill>
-                  <a:srgbClr val="F0F6FC"/>
-                </a:solidFill>
-              </a:defRPr>
-            </a:pPr>
-            <a:r>
-              <a:t>💼 Demonstrates high-level analytical thinking to evaluation panels.</a:t>
-            </a:r>
-          </a:p>
-        </p:txBody>
-      </p:sp>
-    </p:spTree>
-  </p:cSld>
-  <p:clrMapOvr>
-    <a:masterClrMapping/>
-  </p:clrMapOvr>
-</p:sld>
-</file>
-
-<file path=ppt/slides/slide11.xml><?xml version="1.0" encoding="utf-8"?>
-<p:sld xmlns:a="http://schemas.openxmlformats.org/drawingml/2006/main" xmlns:p="http://schemas.openxmlformats.org/presentationml/2006/main" xmlns:r="http://schemas.openxmlformats.org/officeDocument/2006/relationships">
-  <p:cSld>
-    <p:spTree>
-      <p:nvGrpSpPr>
-        <p:cNvPr id="1" name=""/>
-        <p:cNvGrpSpPr/>
-        <p:nvPr/>
-      </p:nvGrpSpPr>
-      <p:grpSpPr/>
-      <p:sp>
-        <p:nvSpPr>
-          <p:cNvPr id="2" name="Rectangle 1"/>
-          <p:cNvSpPr/>
-          <p:nvPr/>
-        </p:nvSpPr>
-        <p:spPr>
-          <a:xfrm>
-            <a:off x="0" y="0"/>
-            <a:ext cx="12191695" cy="6858000"/>
-          </a:xfrm>
-          <a:prstGeom prst="rect">
-            <a:avLst/>
-          </a:prstGeom>
-          <a:solidFill>
-            <a:srgbClr val="0D1117"/>
-          </a:solidFill>
-          <a:ln>
-            <a:noFill/>
-          </a:ln>
-        </p:spPr>
-        <p:style>
-          <a:lnRef idx="1">
-            <a:schemeClr val="accent1"/>
-          </a:lnRef>
-          <a:fillRef idx="3">
-            <a:schemeClr val="accent1"/>
-          </a:fillRef>
-          <a:effectRef idx="2">
-            <a:schemeClr val="accent1"/>
-          </a:effectRef>
-          <a:fontRef idx="minor">
-            <a:schemeClr val="lt1"/>
-          </a:fontRef>
-        </p:style>
-        <p:txBody>
-          <a:bodyPr rtlCol="0" anchor="ctr"/>
-          <a:lstStyle/>
-          <a:p>
-            <a:pPr algn="ctr"/>
-          </a:p>
-        </p:txBody>
-      </p:sp>
-      <p:sp>
-        <p:nvSpPr>
-          <p:cNvPr id="3" name="TextBox 2"/>
-          <p:cNvSpPr txBox="1"/>
-          <p:nvPr/>
-        </p:nvSpPr>
-        <p:spPr>
-          <a:xfrm>
-            <a:off x="731520" y="365760"/>
-            <a:ext cx="10698480" cy="365760"/>
-          </a:xfrm>
-          <a:prstGeom prst="rect">
-            <a:avLst/>
-          </a:prstGeom>
-          <a:noFill/>
-        </p:spPr>
-        <p:txBody>
-          <a:bodyPr wrap="square">
-            <a:spAutoFit/>
-          </a:bodyPr>
-          <a:lstStyle/>
-          <a:p>
-            <a:pPr>
-              <a:defRPr sz="1100" b="1">
-                <a:solidFill>
-                  <a:srgbClr val="00D4FF"/>
-                </a:solidFill>
-              </a:defRPr>
-            </a:pPr>
-            <a:r>
-              <a:t>10 / MOBILE ALERTING</a:t>
-            </a:r>
-          </a:p>
-        </p:txBody>
-      </p:sp>
-      <p:sp>
-        <p:nvSpPr>
-          <p:cNvPr id="4" name="TextBox 3"/>
-          <p:cNvSpPr txBox="1"/>
-          <p:nvPr/>
-        </p:nvSpPr>
-        <p:spPr>
-          <a:xfrm>
-            <a:off x="731520" y="685800"/>
-            <a:ext cx="10698480" cy="731520"/>
-          </a:xfrm>
-          <a:prstGeom prst="rect">
-            <a:avLst/>
-          </a:prstGeom>
-          <a:noFill/>
-        </p:spPr>
-        <p:txBody>
-          <a:bodyPr wrap="square">
-            <a:spAutoFit/>
-          </a:bodyPr>
-          <a:lstStyle/>
-          <a:p>
-            <a:pPr>
-              <a:defRPr sz="2600" b="1">
-                <a:solidFill>
-                  <a:srgbClr val="F0F6FC"/>
-                </a:solidFill>
-              </a:defRPr>
-            </a:pPr>
-            <a:r>
-              <a:t>Automated Mobile Push Alerts via Telegram API</a:t>
-            </a:r>
-          </a:p>
-        </p:txBody>
-      </p:sp>
-      <p:sp>
-        <p:nvSpPr>
-          <p:cNvPr id="5" name="Rounded Rectangle 4"/>
-          <p:cNvSpPr/>
-          <p:nvPr/>
-        </p:nvSpPr>
-        <p:spPr>
-          <a:xfrm>
-            <a:off x="731520" y="1645920"/>
-            <a:ext cx="5120640" cy="4572000"/>
-          </a:xfrm>
-          <a:prstGeom prst="roundRect">
-            <a:avLst/>
-          </a:prstGeom>
-          <a:solidFill>
-            <a:srgbClr val="161B22"/>
-          </a:solidFill>
-          <a:ln w="19050">
-            <a:solidFill>
-              <a:srgbClr val="00D4FF"/>
-            </a:solidFill>
-          </a:ln>
-        </p:spPr>
-        <p:style>
-          <a:lnRef idx="1">
-            <a:schemeClr val="accent1"/>
-          </a:lnRef>
-          <a:fillRef idx="3">
-            <a:schemeClr val="accent1"/>
-          </a:fillRef>
-          <a:effectRef idx="2">
-            <a:schemeClr val="accent1"/>
-          </a:effectRef>
-          <a:fontRef idx="minor">
-            <a:schemeClr val="lt1"/>
-          </a:fontRef>
-        </p:style>
-        <p:txBody>
-          <a:bodyPr rtlCol="0" anchor="ctr"/>
-          <a:lstStyle/>
-          <a:p>
-            <a:pPr algn="ctr"/>
-          </a:p>
-        </p:txBody>
-      </p:sp>
-      <p:sp>
-        <p:nvSpPr>
-          <p:cNvPr id="6" name="TextBox 5"/>
-          <p:cNvSpPr txBox="1"/>
-          <p:nvPr/>
-        </p:nvSpPr>
-        <p:spPr>
-          <a:xfrm>
-            <a:off x="960120" y="1828800"/>
-            <a:ext cx="4663440" cy="4206240"/>
-          </a:xfrm>
-          <a:prstGeom prst="rect">
-            <a:avLst/>
-          </a:prstGeom>
-          <a:noFill/>
-        </p:spPr>
-        <p:txBody>
-          <a:bodyPr wrap="square">
-            <a:spAutoFit/>
-          </a:bodyPr>
-          <a:lstStyle/>
-          <a:p>
-            <a:pPr>
-              <a:spcAft>
-                <a:spcPts val="1200"/>
-              </a:spcAft>
-              <a:defRPr sz="1800" b="1">
-                <a:solidFill>
-                  <a:srgbClr val="00D4FF"/>
-                </a:solidFill>
-              </a:defRPr>
-            </a:pPr>
-            <a:r>
-              <a:t>Architecture &amp; Delivery Pipeline</a:t>
-            </a:r>
-          </a:p>
-          <a:p>
-            <a:pPr>
-              <a:spcAft>
-                <a:spcPts val="800"/>
-              </a:spcAft>
-              <a:defRPr sz="1300">
-                <a:solidFill>
-                  <a:srgbClr val="F0F6FC"/>
-                </a:solidFill>
-              </a:defRPr>
-            </a:pPr>
-            <a:r>
-              <a:t>📱 Zero-Latency Smartphone Notification:</a:t>
-            </a:r>
-          </a:p>
-          <a:p>
-            <a:pPr>
-              <a:spcAft>
-                <a:spcPts val="800"/>
-              </a:spcAft>
-              <a:defRPr sz="1300">
-                <a:solidFill>
-                  <a:srgbClr val="F0F6FC"/>
-                </a:solidFill>
-              </a:defRPr>
-            </a:pPr>
-            <a:r>
-              <a:t>   Uses official Telegram Bot API to dispatch push notifications with vibration.</a:t>
-            </a:r>
-          </a:p>
-          <a:p>
-            <a:pPr>
-              <a:spcAft>
-                <a:spcPts val="800"/>
-              </a:spcAft>
-              <a:defRPr sz="1300">
-                <a:solidFill>
-                  <a:srgbClr val="F0F6FC"/>
-                </a:solidFill>
-              </a:defRPr>
-            </a:pPr>
-            <a:r>
-              <a:t>⚡ Sub-500ms Dispatch Time:</a:t>
-            </a:r>
-          </a:p>
-          <a:p>
-            <a:pPr>
-              <a:spcAft>
-                <a:spcPts val="800"/>
-              </a:spcAft>
-              <a:defRPr sz="1300">
-                <a:solidFill>
-                  <a:srgbClr val="F0F6FC"/>
-                </a:solidFill>
-              </a:defRPr>
-            </a:pPr>
-            <a:r>
-              <a:t>   Triggered immediately within `scoring_engine.py` without polling delays.</a:t>
-            </a:r>
-          </a:p>
-          <a:p>
-            <a:pPr>
-              <a:spcAft>
-                <a:spcPts val="800"/>
-              </a:spcAft>
-              <a:defRPr sz="1300">
-                <a:solidFill>
-                  <a:srgbClr val="F0F6FC"/>
-                </a:solidFill>
-              </a:defRPr>
-            </a:pPr>
-            <a:r>
-              <a:t>🛡️ OWASP Secure Secret Handling:</a:t>
-            </a:r>
-          </a:p>
-          <a:p>
-            <a:pPr>
-              <a:spcAft>
-                <a:spcPts val="800"/>
-              </a:spcAft>
-              <a:defRPr sz="1300">
-                <a:solidFill>
-                  <a:srgbClr val="F0F6FC"/>
-                </a:solidFill>
-              </a:defRPr>
-            </a:pPr>
-            <a:r>
-              <a:t>   Token is loaded dynamically from `.env` or settings, kept out of git tracking via `.gitignore`.</a:t>
-            </a:r>
-          </a:p>
-          <a:p>
-            <a:pPr>
-              <a:spcAft>
-                <a:spcPts val="800"/>
-              </a:spcAft>
-              <a:defRPr sz="1300">
-                <a:solidFill>
-                  <a:srgbClr val="F0F6FC"/>
-                </a:solidFill>
-              </a:defRPr>
-            </a:pPr>
-            <a:r>
-              <a:t>✅ Verified Live on Jaskaran's phone (Chat ID: 8904919229).</a:t>
-            </a:r>
-          </a:p>
-        </p:txBody>
-      </p:sp>
-      <p:sp>
-        <p:nvSpPr>
-          <p:cNvPr id="7" name="Rounded Rectangle 6"/>
-          <p:cNvSpPr/>
-          <p:nvPr/>
-        </p:nvSpPr>
-        <p:spPr>
-          <a:xfrm>
-            <a:off x="6217920" y="1645920"/>
-            <a:ext cx="5212080" cy="4572000"/>
-          </a:xfrm>
-          <a:prstGeom prst="roundRect">
-            <a:avLst/>
-          </a:prstGeom>
-          <a:solidFill>
-            <a:srgbClr val="161B22"/>
-          </a:solidFill>
-          <a:ln w="19050">
-            <a:solidFill>
-              <a:srgbClr val="FF4444"/>
-            </a:solidFill>
-          </a:ln>
-        </p:spPr>
-        <p:style>
-          <a:lnRef idx="1">
-            <a:schemeClr val="accent1"/>
-          </a:lnRef>
-          <a:fillRef idx="3">
-            <a:schemeClr val="accent1"/>
-          </a:fillRef>
-          <a:effectRef idx="2">
-            <a:schemeClr val="accent1"/>
-          </a:effectRef>
-          <a:fontRef idx="minor">
-            <a:schemeClr val="lt1"/>
-          </a:fontRef>
-        </p:style>
-        <p:txBody>
-          <a:bodyPr rtlCol="0" anchor="ctr"/>
-          <a:lstStyle/>
-          <a:p>
-            <a:pPr algn="ctr"/>
-          </a:p>
-        </p:txBody>
-      </p:sp>
-      <p:sp>
-        <p:nvSpPr>
-          <p:cNvPr id="8" name="TextBox 7"/>
-          <p:cNvSpPr txBox="1"/>
-          <p:nvPr/>
-        </p:nvSpPr>
-        <p:spPr>
-          <a:xfrm>
-            <a:off x="6446520" y="1828800"/>
-            <a:ext cx="4754880" cy="4206240"/>
-          </a:xfrm>
-          <a:prstGeom prst="rect">
-            <a:avLst/>
-          </a:prstGeom>
-          <a:noFill/>
-        </p:spPr>
-        <p:txBody>
-          <a:bodyPr wrap="square">
-            <a:spAutoFit/>
-          </a:bodyPr>
-          <a:lstStyle/>
-          <a:p>
-            <a:pPr>
-              <a:spcAft>
-                <a:spcPts val="1200"/>
-              </a:spcAft>
-              <a:defRPr sz="1800" b="1">
-                <a:solidFill>
-                  <a:srgbClr val="FF4444"/>
-                </a:solidFill>
-              </a:defRPr>
-            </a:pPr>
-            <a:r>
-              <a:t>Sample Formatted Push Alert</a:t>
-            </a:r>
-          </a:p>
-          <a:p>
-            <a:pPr>
-              <a:spcAft>
-                <a:spcPts val="800"/>
-              </a:spcAft>
-              <a:defRPr sz="1300">
-                <a:solidFill>
-                  <a:srgbClr val="F0F6FC"/>
-                </a:solidFill>
-              </a:defRPr>
-            </a:pPr>
-            <a:r>
-              <a:t>🔴 CRITICAL ALERT — MIRAGE Junior</a:t>
-            </a:r>
-          </a:p>
-          <a:p>
-            <a:pPr>
-              <a:spcAft>
-                <a:spcPts val="800"/>
-              </a:spcAft>
-              <a:defRPr sz="1300">
-                <a:solidFill>
-                  <a:srgbClr val="F0F6FC"/>
-                </a:solidFill>
-              </a:defRPr>
-            </a:pPr>
-            <a:r>
-              <a:t>━━━━━━━━━━━━━━━━━━━━━━━━━━</a:t>
-            </a:r>
-          </a:p>
-          <a:p>
-            <a:pPr>
-              <a:spcAft>
-                <a:spcPts val="800"/>
-              </a:spcAft>
-              <a:defRPr sz="1300">
-                <a:solidFill>
-                  <a:srgbClr val="F0F6FC"/>
-                </a:solidFill>
-              </a:defRPr>
-            </a:pPr>
-            <a:r>
-              <a:t>🌍 IP: 45.33.32.156 (Russia, Moscow)</a:t>
-            </a:r>
-          </a:p>
-          <a:p>
-            <a:pPr>
-              <a:spcAft>
-                <a:spcPts val="800"/>
-              </a:spcAft>
-              <a:defRPr sz="1300">
-                <a:solidFill>
-                  <a:srgbClr val="F0F6FC"/>
-                </a:solidFill>
-              </a:defRPr>
-            </a:pPr>
-            <a:r>
-              <a:t>📊 Threat Score: 88/100</a:t>
-            </a:r>
-          </a:p>
-          <a:p>
-            <a:pPr>
-              <a:spcAft>
-                <a:spcPts val="800"/>
-              </a:spcAft>
-              <a:defRPr sz="1300">
-                <a:solidFill>
-                  <a:srgbClr val="F0F6FC"/>
-                </a:solidFill>
-              </a:defRPr>
-            </a:pPr>
-            <a:r>
-              <a:t>🎯 Classification: CRITICAL</a:t>
-            </a:r>
-          </a:p>
-          <a:p>
-            <a:pPr>
-              <a:spcAft>
-                <a:spcPts val="800"/>
-              </a:spcAft>
-              <a:defRPr sz="1300">
-                <a:solidFill>
-                  <a:srgbClr val="F0F6FC"/>
-                </a:solidFill>
-              </a:defRPr>
-            </a:pPr>
-          </a:p>
-          <a:p>
-            <a:pPr>
-              <a:spcAft>
-                <a:spcPts val="800"/>
-              </a:spcAft>
-              <a:defRPr sz="1300">
-                <a:solidFill>
-                  <a:srgbClr val="F0F6FC"/>
-                </a:solidFill>
-              </a:defRPr>
-            </a:pPr>
-            <a:r>
-              <a:t>📋 Summary:</a:t>
-            </a:r>
-          </a:p>
-          <a:p>
-            <a:pPr>
-              <a:spcAft>
-                <a:spcPts val="800"/>
-              </a:spcAft>
-              <a:defRPr sz="1300">
-                <a:solidFill>
-                  <a:srgbClr val="F0F6FC"/>
-                </a:solidFill>
-              </a:defRPr>
-            </a:pPr>
-            <a:r>
-              <a:t>Attacker accessed honeytoken /.env and executed shell command whoami. Auto-quarantined at 25 points.</a:t>
-            </a:r>
-          </a:p>
-        </p:txBody>
-      </p:sp>
-    </p:spTree>
-  </p:cSld>
-  <p:clrMapOvr>
-    <a:masterClrMapping/>
-  </p:clrMapOvr>
-</p:sld>
-</file>
-
-<file path=ppt/slides/slide12.xml><?xml version="1.0" encoding="utf-8"?>
-<p:sld xmlns:a="http://schemas.openxmlformats.org/drawingml/2006/main" xmlns:p="http://schemas.openxmlformats.org/presentationml/2006/main" xmlns:r="http://schemas.openxmlformats.org/officeDocument/2006/relationships">
-  <p:cSld>
-    <p:spTree>
-      <p:nvGrpSpPr>
-        <p:cNvPr id="1" name=""/>
-        <p:cNvGrpSpPr/>
-        <p:nvPr/>
-      </p:nvGrpSpPr>
-      <p:grpSpPr/>
-      <p:sp>
-        <p:nvSpPr>
-          <p:cNvPr id="2" name="Rectangle 1"/>
-          <p:cNvSpPr/>
-          <p:nvPr/>
-        </p:nvSpPr>
-        <p:spPr>
-          <a:xfrm>
-            <a:off x="0" y="0"/>
-            <a:ext cx="12191695" cy="6858000"/>
-          </a:xfrm>
-          <a:prstGeom prst="rect">
-            <a:avLst/>
-          </a:prstGeom>
-          <a:solidFill>
-            <a:srgbClr val="0D1117"/>
-          </a:solidFill>
-          <a:ln>
-            <a:noFill/>
-          </a:ln>
-        </p:spPr>
-        <p:style>
-          <a:lnRef idx="1">
-            <a:schemeClr val="accent1"/>
-          </a:lnRef>
-          <a:fillRef idx="3">
-            <a:schemeClr val="accent1"/>
-          </a:fillRef>
-          <a:effectRef idx="2">
-            <a:schemeClr val="accent1"/>
-          </a:effectRef>
-          <a:fontRef idx="minor">
-            <a:schemeClr val="lt1"/>
-          </a:fontRef>
-        </p:style>
-        <p:txBody>
-          <a:bodyPr rtlCol="0" anchor="ctr"/>
-          <a:lstStyle/>
-          <a:p>
-            <a:pPr algn="ctr"/>
-          </a:p>
-        </p:txBody>
-      </p:sp>
-      <p:sp>
-        <p:nvSpPr>
-          <p:cNvPr id="3" name="TextBox 2"/>
-          <p:cNvSpPr txBox="1"/>
-          <p:nvPr/>
-        </p:nvSpPr>
-        <p:spPr>
-          <a:xfrm>
-            <a:off x="731520" y="365760"/>
-            <a:ext cx="10698480" cy="365760"/>
-          </a:xfrm>
-          <a:prstGeom prst="rect">
-            <a:avLst/>
-          </a:prstGeom>
-          <a:noFill/>
-        </p:spPr>
-        <p:txBody>
-          <a:bodyPr wrap="square">
-            <a:spAutoFit/>
-          </a:bodyPr>
-          <a:lstStyle/>
-          <a:p>
-            <a:pPr>
-              <a:defRPr sz="1100" b="1">
-                <a:solidFill>
-                  <a:srgbClr val="00D4FF"/>
-                </a:solidFill>
-              </a:defRPr>
-            </a:pPr>
-            <a:r>
-              <a:t>11 / QUALITY ASSURANCE</a:t>
-            </a:r>
-          </a:p>
-        </p:txBody>
-      </p:sp>
-      <p:sp>
-        <p:nvSpPr>
-          <p:cNvPr id="4" name="TextBox 3"/>
-          <p:cNvSpPr txBox="1"/>
-          <p:nvPr/>
-        </p:nvSpPr>
-        <p:spPr>
-          <a:xfrm>
-            <a:off x="731520" y="685800"/>
-            <a:ext cx="10698480" cy="731520"/>
-          </a:xfrm>
-          <a:prstGeom prst="rect">
-            <a:avLst/>
-          </a:prstGeom>
-          <a:noFill/>
-        </p:spPr>
-        <p:txBody>
-          <a:bodyPr wrap="square">
-            <a:spAutoFit/>
-          </a:bodyPr>
-          <a:lstStyle/>
-          <a:p>
-            <a:pPr>
-              <a:defRPr sz="2600" b="1">
-                <a:solidFill>
-                  <a:srgbClr val="F0F6FC"/>
-                </a:solidFill>
-              </a:defRPr>
-            </a:pPr>
-            <a:r>
-              <a:t>Testing, Verification &amp; Concurrency Performance</a:t>
-            </a:r>
-          </a:p>
-        </p:txBody>
-      </p:sp>
-      <p:sp>
-        <p:nvSpPr>
-          <p:cNvPr id="5" name="Rounded Rectangle 4"/>
-          <p:cNvSpPr/>
-          <p:nvPr/>
-        </p:nvSpPr>
-        <p:spPr>
-          <a:xfrm>
-            <a:off x="731520" y="1645920"/>
-            <a:ext cx="5120640" cy="4572000"/>
-          </a:xfrm>
-          <a:prstGeom prst="roundRect">
-            <a:avLst/>
-          </a:prstGeom>
-          <a:solidFill>
-            <a:srgbClr val="161B22"/>
-          </a:solidFill>
-          <a:ln w="19050">
-            <a:solidFill>
-              <a:srgbClr val="00FF41"/>
-            </a:solidFill>
-          </a:ln>
-        </p:spPr>
-        <p:style>
-          <a:lnRef idx="1">
-            <a:schemeClr val="accent1"/>
-          </a:lnRef>
-          <a:fillRef idx="3">
-            <a:schemeClr val="accent1"/>
-          </a:fillRef>
-          <a:effectRef idx="2">
-            <a:schemeClr val="accent1"/>
-          </a:effectRef>
-          <a:fontRef idx="minor">
-            <a:schemeClr val="lt1"/>
-          </a:fontRef>
-        </p:style>
-        <p:txBody>
-          <a:bodyPr rtlCol="0" anchor="ctr"/>
-          <a:lstStyle/>
-          <a:p>
-            <a:pPr algn="ctr"/>
-          </a:p>
-        </p:txBody>
-      </p:sp>
-      <p:sp>
-        <p:nvSpPr>
-          <p:cNvPr id="6" name="TextBox 5"/>
-          <p:cNvSpPr txBox="1"/>
-          <p:nvPr/>
-        </p:nvSpPr>
-        <p:spPr>
-          <a:xfrm>
-            <a:off x="960120" y="1828800"/>
-            <a:ext cx="4663440" cy="4206240"/>
-          </a:xfrm>
-          <a:prstGeom prst="rect">
-            <a:avLst/>
-          </a:prstGeom>
-          <a:noFill/>
-        </p:spPr>
-        <p:txBody>
-          <a:bodyPr wrap="square">
-            <a:spAutoFit/>
-          </a:bodyPr>
-          <a:lstStyle/>
-          <a:p>
-            <a:pPr>
-              <a:spcAft>
-                <a:spcPts val="1200"/>
-              </a:spcAft>
-              <a:defRPr sz="1800" b="1">
-                <a:solidFill>
-                  <a:srgbClr val="00FF41"/>
-                </a:solidFill>
-              </a:defRPr>
-            </a:pPr>
-            <a:r>
-              <a:t>Pytest Test Suite (100% Passing)</a:t>
-            </a:r>
-          </a:p>
-          <a:p>
-            <a:pPr>
-              <a:spcAft>
-                <a:spcPts val="800"/>
-              </a:spcAft>
-              <a:defRPr sz="1300">
-                <a:solidFill>
-                  <a:srgbClr val="F0F6FC"/>
-                </a:solidFill>
-              </a:defRPr>
-            </a:pPr>
-            <a:r>
-              <a:t>🧪 14 Test Cases Covering:</a:t>
-            </a:r>
-          </a:p>
-          <a:p>
-            <a:pPr>
-              <a:spcAft>
-                <a:spcPts val="800"/>
-              </a:spcAft>
-              <a:defRPr sz="1300">
-                <a:solidFill>
-                  <a:srgbClr val="F0F6FC"/>
-                </a:solidFill>
-              </a:defRPr>
-            </a:pPr>
-            <a:r>
-              <a:t>   • Initial threat score begins at 0 (`test_score_starts_at_zero`).</a:t>
-            </a:r>
-          </a:p>
-          <a:p>
-            <a:pPr>
-              <a:spcAft>
-                <a:spcPts val="800"/>
-              </a:spcAft>
-              <a:defRPr sz="1300">
-                <a:solidFill>
-                  <a:srgbClr val="F0F6FC"/>
-                </a:solidFill>
-              </a:defRPr>
-            </a:pPr>
-            <a:r>
-              <a:t>   • Threat score caps safely at 100 max ceiling (`test_score_caps_at_100`).</a:t>
-            </a:r>
-          </a:p>
-          <a:p>
-            <a:pPr>
-              <a:spcAft>
-                <a:spcPts val="800"/>
-              </a:spcAft>
-              <a:defRPr sz="1300">
-                <a:solidFill>
-                  <a:srgbClr val="F0F6FC"/>
-                </a:solidFill>
-              </a:defRPr>
-            </a:pPr>
-            <a:r>
-              <a:t>   • Lateral scan bonus (+15 pts) applied on multi-port attacks.</a:t>
-            </a:r>
-          </a:p>
-          <a:p>
-            <a:pPr>
-              <a:spcAft>
-                <a:spcPts val="800"/>
-              </a:spcAft>
-              <a:defRPr sz="1300">
-                <a:solidFill>
-                  <a:srgbClr val="F0F6FC"/>
-                </a:solidFill>
-              </a:defRPr>
-            </a:pPr>
-            <a:r>
-              <a:t>   • Honeytoken monitor instantiation &amp; directory structure.</a:t>
-            </a:r>
-          </a:p>
-          <a:p>
-            <a:pPr>
-              <a:spcAft>
-                <a:spcPts val="800"/>
-              </a:spcAft>
-              <a:defRPr sz="1300">
-                <a:solidFill>
-                  <a:srgbClr val="F0F6FC"/>
-                </a:solidFill>
-              </a:defRPr>
-            </a:pPr>
-            <a:r>
-              <a:t>   • Auto-quarantine execution at 25 points (`test_quarantine_at_25_pts`).</a:t>
-            </a:r>
-          </a:p>
-          <a:p>
-            <a:pPr>
-              <a:spcAft>
-                <a:spcPts val="800"/>
-              </a:spcAft>
-              <a:defRPr sz="1300">
-                <a:solidFill>
-                  <a:srgbClr val="F0F6FC"/>
-                </a:solidFill>
-              </a:defRPr>
-            </a:pPr>
-            <a:r>
-              <a:t>   • Database trigger logging in isolated temporary SQLite fixtures.</a:t>
-            </a:r>
-          </a:p>
-        </p:txBody>
-      </p:sp>
-      <p:sp>
-        <p:nvSpPr>
-          <p:cNvPr id="7" name="Rounded Rectangle 6"/>
-          <p:cNvSpPr/>
-          <p:nvPr/>
-        </p:nvSpPr>
-        <p:spPr>
-          <a:xfrm>
-            <a:off x="6217920" y="1645920"/>
-            <a:ext cx="5212080" cy="4572000"/>
-          </a:xfrm>
-          <a:prstGeom prst="roundRect">
-            <a:avLst/>
-          </a:prstGeom>
-          <a:solidFill>
-            <a:srgbClr val="161B22"/>
-          </a:solidFill>
-          <a:ln w="19050">
-            <a:solidFill>
-              <a:srgbClr val="00D4FF"/>
-            </a:solidFill>
-          </a:ln>
-        </p:spPr>
-        <p:style>
-          <a:lnRef idx="1">
-            <a:schemeClr val="accent1"/>
-          </a:lnRef>
-          <a:fillRef idx="3">
-            <a:schemeClr val="accent1"/>
-          </a:fillRef>
-          <a:effectRef idx="2">
-            <a:schemeClr val="accent1"/>
-          </a:effectRef>
-          <a:fontRef idx="minor">
-            <a:schemeClr val="lt1"/>
-          </a:fontRef>
-        </p:style>
-        <p:txBody>
-          <a:bodyPr rtlCol="0" anchor="ctr"/>
-          <a:lstStyle/>
-          <a:p>
-            <a:pPr algn="ctr"/>
-          </a:p>
-        </p:txBody>
-      </p:sp>
-      <p:sp>
-        <p:nvSpPr>
-          <p:cNvPr id="8" name="TextBox 7"/>
-          <p:cNvSpPr txBox="1"/>
-          <p:nvPr/>
-        </p:nvSpPr>
-        <p:spPr>
-          <a:xfrm>
-            <a:off x="6446520" y="1828800"/>
-            <a:ext cx="4754880" cy="4206240"/>
-          </a:xfrm>
-          <a:prstGeom prst="rect">
-            <a:avLst/>
-          </a:prstGeom>
-          <a:noFill/>
-        </p:spPr>
-        <p:txBody>
-          <a:bodyPr wrap="square">
-            <a:spAutoFit/>
-          </a:bodyPr>
-          <a:lstStyle/>
-          <a:p>
-            <a:pPr>
-              <a:spcAft>
-                <a:spcPts val="1200"/>
-              </a:spcAft>
-              <a:defRPr sz="1800" b="1">
-                <a:solidFill>
-                  <a:srgbClr val="00D4FF"/>
-                </a:solidFill>
-              </a:defRPr>
-            </a:pPr>
-            <a:r>
-              <a:t>Database Concurrency (SQLite WAL Mode)</a:t>
-            </a:r>
-          </a:p>
-          <a:p>
-            <a:pPr>
-              <a:spcAft>
-                <a:spcPts val="800"/>
-              </a:spcAft>
-              <a:defRPr sz="1300">
-                <a:solidFill>
-                  <a:srgbClr val="F0F6FC"/>
-                </a:solidFill>
-              </a:defRPr>
-            </a:pPr>
-            <a:r>
-              <a:t>⚡ High-Concurrency Challenge:</a:t>
-            </a:r>
-          </a:p>
-          <a:p>
-            <a:pPr>
-              <a:spcAft>
-                <a:spcPts val="800"/>
-              </a:spcAft>
-              <a:defRPr sz="1300">
-                <a:solidFill>
-                  <a:srgbClr val="F0F6FC"/>
-                </a:solidFill>
-              </a:defRPr>
-            </a:pPr>
-            <a:r>
-              <a:t>   SSH trap, HTTP decoy, FTP trap, and dashboard workers write simultaneously.</a:t>
-            </a:r>
-          </a:p>
-          <a:p>
-            <a:pPr>
-              <a:spcAft>
-                <a:spcPts val="800"/>
-              </a:spcAft>
-              <a:defRPr sz="1300">
-                <a:solidFill>
-                  <a:srgbClr val="F0F6FC"/>
-                </a:solidFill>
-              </a:defRPr>
-            </a:pPr>
-            <a:r>
-              <a:t>🔒 SQLite Default Locking: Causes 'database is locked' crashes under concurrent load.</a:t>
-            </a:r>
-          </a:p>
-          <a:p>
-            <a:pPr>
-              <a:spcAft>
-                <a:spcPts val="800"/>
-              </a:spcAft>
-              <a:defRPr sz="1300">
-                <a:solidFill>
-                  <a:srgbClr val="F0F6FC"/>
-                </a:solidFill>
-              </a:defRPr>
-            </a:pPr>
-            <a:r>
-              <a:t>🚀 Solution: Write-Ahead Logging:</a:t>
-            </a:r>
-          </a:p>
-          <a:p>
-            <a:pPr>
-              <a:spcAft>
-                <a:spcPts val="800"/>
-              </a:spcAft>
-              <a:defRPr sz="1300">
-                <a:solidFill>
-                  <a:srgbClr val="F0F6FC"/>
-                </a:solidFill>
-              </a:defRPr>
-            </a:pPr>
-            <a:r>
-              <a:t>   PRAGMA journal_mode = WAL;</a:t>
-            </a:r>
-          </a:p>
-          <a:p>
-            <a:pPr>
-              <a:spcAft>
-                <a:spcPts val="800"/>
-              </a:spcAft>
-              <a:defRPr sz="1300">
-                <a:solidFill>
-                  <a:srgbClr val="F0F6FC"/>
-                </a:solidFill>
-              </a:defRPr>
-            </a:pPr>
-            <a:r>
-              <a:t>   PRAGMA busy_timeout = 5000;</a:t>
-            </a:r>
-          </a:p>
-          <a:p>
-            <a:pPr>
-              <a:spcAft>
-                <a:spcPts val="800"/>
-              </a:spcAft>
-              <a:defRPr sz="1300">
-                <a:solidFill>
-                  <a:srgbClr val="F0F6FC"/>
-                </a:solidFill>
-              </a:defRPr>
-            </a:pPr>
-            <a:r>
-              <a:t>   • Enables concurrent readers and writers.</a:t>
-            </a:r>
-          </a:p>
-          <a:p>
-            <a:pPr>
-              <a:spcAft>
-                <a:spcPts val="800"/>
-              </a:spcAft>
-              <a:defRPr sz="1300">
-                <a:solidFill>
-                  <a:srgbClr val="F0F6FC"/>
-                </a:solidFill>
-              </a:defRPr>
-            </a:pPr>
-            <a:r>
-              <a:t>   • Database indexes on `ip_address`, `timestamp`, and `protocol` ensure sub-millisecond query performance.</a:t>
-            </a:r>
-          </a:p>
-        </p:txBody>
-      </p:sp>
-    </p:spTree>
-  </p:cSld>
-  <p:clrMapOvr>
-    <a:masterClrMapping/>
-  </p:clrMapOvr>
-</p:sld>
-</file>
-
-<file path=ppt/slides/slide13.xml><?xml version="1.0" encoding="utf-8"?>
-<p:sld xmlns:a="http://schemas.openxmlformats.org/drawingml/2006/main" xmlns:p="http://schemas.openxmlformats.org/presentationml/2006/main" xmlns:r="http://schemas.openxmlformats.org/officeDocument/2006/relationships">
-  <p:cSld>
-    <p:spTree>
-      <p:nvGrpSpPr>
-        <p:cNvPr id="1" name=""/>
-        <p:cNvGrpSpPr/>
-        <p:nvPr/>
-      </p:nvGrpSpPr>
-      <p:grpSpPr/>
-      <p:sp>
-        <p:nvSpPr>
-          <p:cNvPr id="2" name="Rectangle 1"/>
-          <p:cNvSpPr/>
-          <p:nvPr/>
-        </p:nvSpPr>
-        <p:spPr>
-          <a:xfrm>
-            <a:off x="0" y="0"/>
-            <a:ext cx="12191695" cy="6858000"/>
-          </a:xfrm>
-          <a:prstGeom prst="rect">
-            <a:avLst/>
-          </a:prstGeom>
-          <a:solidFill>
-            <a:srgbClr val="0D1117"/>
-          </a:solidFill>
-          <a:ln>
-            <a:noFill/>
-          </a:ln>
-        </p:spPr>
-        <p:style>
-          <a:lnRef idx="1">
-            <a:schemeClr val="accent1"/>
-          </a:lnRef>
-          <a:fillRef idx="3">
-            <a:schemeClr val="accent1"/>
-          </a:fillRef>
-          <a:effectRef idx="2">
-            <a:schemeClr val="accent1"/>
-          </a:effectRef>
-          <a:fontRef idx="minor">
-            <a:schemeClr val="lt1"/>
-          </a:fontRef>
-        </p:style>
-        <p:txBody>
-          <a:bodyPr rtlCol="0" anchor="ctr"/>
-          <a:lstStyle/>
-          <a:p>
-            <a:pPr algn="ctr"/>
-          </a:p>
-        </p:txBody>
-      </p:sp>
-      <p:sp>
-        <p:nvSpPr>
-          <p:cNvPr id="3" name="TextBox 2"/>
-          <p:cNvSpPr txBox="1"/>
-          <p:nvPr/>
-        </p:nvSpPr>
-        <p:spPr>
-          <a:xfrm>
-            <a:off x="731520" y="365760"/>
-            <a:ext cx="10698480" cy="365760"/>
-          </a:xfrm>
-          <a:prstGeom prst="rect">
-            <a:avLst/>
-          </a:prstGeom>
-          <a:noFill/>
-        </p:spPr>
-        <p:txBody>
-          <a:bodyPr wrap="square">
-            <a:spAutoFit/>
-          </a:bodyPr>
-          <a:lstStyle/>
-          <a:p>
-            <a:pPr>
-              <a:defRPr sz="1100" b="1">
-                <a:solidFill>
-                  <a:srgbClr val="00D4FF"/>
-                </a:solidFill>
-              </a:defRPr>
-            </a:pPr>
-            <a:r>
-              <a:t>12 / CONCLUSION &amp; ROADMAP</a:t>
-            </a:r>
-          </a:p>
-        </p:txBody>
-      </p:sp>
-      <p:sp>
-        <p:nvSpPr>
-          <p:cNvPr id="4" name="TextBox 3"/>
-          <p:cNvSpPr txBox="1"/>
-          <p:nvPr/>
-        </p:nvSpPr>
-        <p:spPr>
-          <a:xfrm>
-            <a:off x="731520" y="685800"/>
-            <a:ext cx="10698480" cy="731520"/>
-          </a:xfrm>
-          <a:prstGeom prst="rect">
-            <a:avLst/>
-          </a:prstGeom>
-          <a:noFill/>
-        </p:spPr>
-        <p:txBody>
-          <a:bodyPr wrap="square">
-            <a:spAutoFit/>
-          </a:bodyPr>
-          <a:lstStyle/>
-          <a:p>
-            <a:pPr>
-              <a:defRPr sz="2600" b="1">
-                <a:solidFill>
-                  <a:srgbClr val="F0F6FC"/>
-                </a:solidFill>
-              </a:defRPr>
-            </a:pPr>
-            <a:r>
-              <a:t>Academic Outcomes, Industry Relevance &amp; Roadmap</a:t>
-            </a:r>
-          </a:p>
-        </p:txBody>
-      </p:sp>
-      <p:sp>
-        <p:nvSpPr>
-          <p:cNvPr id="5" name="Rounded Rectangle 4"/>
-          <p:cNvSpPr/>
-          <p:nvPr/>
-        </p:nvSpPr>
-        <p:spPr>
-          <a:xfrm>
-            <a:off x="731520" y="1645920"/>
-            <a:ext cx="5120640" cy="4572000"/>
-          </a:xfrm>
-          <a:prstGeom prst="roundRect">
-            <a:avLst/>
-          </a:prstGeom>
-          <a:solidFill>
-            <a:srgbClr val="161B22"/>
-          </a:solidFill>
-          <a:ln w="19050">
-            <a:solidFill>
-              <a:srgbClr val="00FF41"/>
-            </a:solidFill>
-          </a:ln>
-        </p:spPr>
-        <p:style>
-          <a:lnRef idx="1">
-            <a:schemeClr val="accent1"/>
-          </a:lnRef>
-          <a:fillRef idx="3">
-            <a:schemeClr val="accent1"/>
-          </a:fillRef>
-          <a:effectRef idx="2">
-            <a:schemeClr val="accent1"/>
-          </a:effectRef>
-          <a:fontRef idx="minor">
-            <a:schemeClr val="lt1"/>
-          </a:fontRef>
-        </p:style>
-        <p:txBody>
-          <a:bodyPr rtlCol="0" anchor="ctr"/>
-          <a:lstStyle/>
-          <a:p>
-            <a:pPr algn="ctr"/>
-          </a:p>
-        </p:txBody>
-      </p:sp>
-      <p:sp>
-        <p:nvSpPr>
-          <p:cNvPr id="6" name="TextBox 5"/>
-          <p:cNvSpPr txBox="1"/>
-          <p:nvPr/>
-        </p:nvSpPr>
-        <p:spPr>
-          <a:xfrm>
-            <a:off x="960120" y="1828800"/>
-            <a:ext cx="4663440" cy="4206240"/>
-          </a:xfrm>
-          <a:prstGeom prst="rect">
-            <a:avLst/>
-          </a:prstGeom>
-          <a:noFill/>
-        </p:spPr>
-        <p:txBody>
-          <a:bodyPr wrap="square">
-            <a:spAutoFit/>
-          </a:bodyPr>
-          <a:lstStyle/>
-          <a:p>
-            <a:pPr>
-              <a:spcAft>
-                <a:spcPts val="1200"/>
-              </a:spcAft>
-              <a:defRPr sz="1800" b="1">
-                <a:solidFill>
-                  <a:srgbClr val="00FF41"/>
-                </a:solidFill>
-              </a:defRPr>
-            </a:pPr>
-            <a:r>
-              <a:t>Core Academic Outcomes</a:t>
-            </a:r>
-          </a:p>
-          <a:p>
-            <a:pPr>
-              <a:spcAft>
-                <a:spcPts val="800"/>
-              </a:spcAft>
-              <a:defRPr sz="1300">
-                <a:solidFill>
-                  <a:srgbClr val="F0F6FC"/>
-                </a:solidFill>
-              </a:defRPr>
-            </a:pPr>
-            <a:r>
-              <a:t>🎓 Deception Technology Mastery: Practical implementation of cyber deception concepts.</a:t>
-            </a:r>
-          </a:p>
-          <a:p>
-            <a:pPr>
-              <a:spcAft>
-                <a:spcPts val="800"/>
-              </a:spcAft>
-              <a:defRPr sz="1300">
-                <a:solidFill>
-                  <a:srgbClr val="F0F6FC"/>
-                </a:solidFill>
-              </a:defRPr>
-            </a:pPr>
-            <a:r>
-              <a:t>🛠️ Full-Stack Security Engineering: Integrated network sockets, cryptography, firewall APIs, SQLite WAL, and web visualization.</a:t>
-            </a:r>
-          </a:p>
-          <a:p>
-            <a:pPr>
-              <a:spcAft>
-                <a:spcPts val="800"/>
-              </a:spcAft>
-              <a:defRPr sz="1300">
-                <a:solidFill>
-                  <a:srgbClr val="F0F6FC"/>
-                </a:solidFill>
-              </a:defRPr>
-            </a:pPr>
-            <a:r>
-              <a:t>📐 Behavioral Algorithm Design: Designed and verified dynamic scoring heuristics.</a:t>
-            </a:r>
-          </a:p>
-          <a:p>
-            <a:pPr>
-              <a:spcAft>
-                <a:spcPts val="800"/>
-              </a:spcAft>
-              <a:defRPr sz="1300">
-                <a:solidFill>
-                  <a:srgbClr val="F0F6FC"/>
-                </a:solidFill>
-              </a:defRPr>
-            </a:pPr>
-            <a:r>
-              <a:t>🤝 Real-World Teamwork: Clean division of labor between Backend Leader (Jaskaran) and Frontend/Deploy (Relish).</a:t>
-            </a:r>
-          </a:p>
-        </p:txBody>
-      </p:sp>
-      <p:sp>
-        <p:nvSpPr>
-          <p:cNvPr id="7" name="Rounded Rectangle 6"/>
-          <p:cNvSpPr/>
-          <p:nvPr/>
-        </p:nvSpPr>
-        <p:spPr>
-          <a:xfrm>
-            <a:off x="6217920" y="1645920"/>
-            <a:ext cx="5212080" cy="4572000"/>
-          </a:xfrm>
-          <a:prstGeom prst="roundRect">
-            <a:avLst/>
-          </a:prstGeom>
-          <a:solidFill>
-            <a:srgbClr val="161B22"/>
-          </a:solidFill>
-          <a:ln w="19050">
-            <a:solidFill>
-              <a:srgbClr val="00D4FF"/>
-            </a:solidFill>
-          </a:ln>
-        </p:spPr>
-        <p:style>
-          <a:lnRef idx="1">
-            <a:schemeClr val="accent1"/>
-          </a:lnRef>
-          <a:fillRef idx="3">
-            <a:schemeClr val="accent1"/>
-          </a:fillRef>
-          <a:effectRef idx="2">
-            <a:schemeClr val="accent1"/>
-          </a:effectRef>
-          <a:fontRef idx="minor">
-            <a:schemeClr val="lt1"/>
-          </a:fontRef>
-        </p:style>
-        <p:txBody>
-          <a:bodyPr rtlCol="0" anchor="ctr"/>
-          <a:lstStyle/>
-          <a:p>
-            <a:pPr algn="ctr"/>
-          </a:p>
-        </p:txBody>
-      </p:sp>
-      <p:sp>
-        <p:nvSpPr>
-          <p:cNvPr id="8" name="TextBox 7"/>
-          <p:cNvSpPr txBox="1"/>
-          <p:nvPr/>
-        </p:nvSpPr>
-        <p:spPr>
-          <a:xfrm>
-            <a:off x="6446520" y="1828800"/>
-            <a:ext cx="4754880" cy="4206240"/>
-          </a:xfrm>
-          <a:prstGeom prst="rect">
-            <a:avLst/>
-          </a:prstGeom>
-          <a:noFill/>
-        </p:spPr>
-        <p:txBody>
-          <a:bodyPr wrap="square">
-            <a:spAutoFit/>
-          </a:bodyPr>
-          <a:lstStyle/>
-          <a:p>
-            <a:pPr>
-              <a:spcAft>
-                <a:spcPts val="1200"/>
-              </a:spcAft>
-              <a:defRPr sz="1800" b="1">
-                <a:solidFill>
-                  <a:srgbClr val="00D4FF"/>
-                </a:solidFill>
-              </a:defRPr>
-            </a:pPr>
-            <a:r>
-              <a:t>Future Roadmap</a:t>
-            </a:r>
-          </a:p>
-          <a:p>
-            <a:pPr>
-              <a:spcAft>
-                <a:spcPts val="800"/>
-              </a:spcAft>
-              <a:defRPr sz="1300">
-                <a:solidFill>
-                  <a:srgbClr val="F0F6FC"/>
-                </a:solidFill>
-              </a:defRPr>
-            </a:pPr>
-            <a:r>
-              <a:t>🤖 AI-Driven Adaptive Shell: Integrating LLMs to generate contextual dynamic fake responses in SSH terminal.</a:t>
-            </a:r>
-          </a:p>
-          <a:p>
-            <a:pPr>
-              <a:spcAft>
-                <a:spcPts val="800"/>
-              </a:spcAft>
-              <a:defRPr sz="1300">
-                <a:solidFill>
-                  <a:srgbClr val="F0F6FC"/>
-                </a:solidFill>
-              </a:defRPr>
-            </a:pPr>
-            <a:r>
-              <a:t>📦 Docker &amp; Kubernetes Deployment: Containerized honeypot pods with automated network isolation.</a:t>
-            </a:r>
-          </a:p>
-          <a:p>
-            <a:pPr>
-              <a:spcAft>
-                <a:spcPts val="800"/>
-              </a:spcAft>
-              <a:defRPr sz="1300">
-                <a:solidFill>
-                  <a:srgbClr val="F0F6FC"/>
-                </a:solidFill>
-              </a:defRPr>
-            </a:pPr>
-            <a:r>
-              <a:t>📡 STIX/TAXII Threat Feed Export: Automated threat intelligence sharing with external SIEMs.</a:t>
-            </a:r>
-          </a:p>
-          <a:p>
-            <a:pPr>
-              <a:spcAft>
-                <a:spcPts val="800"/>
-              </a:spcAft>
-              <a:defRPr sz="1300">
-                <a:solidFill>
-                  <a:srgbClr val="F0F6FC"/>
-                </a:solidFill>
-              </a:defRPr>
-            </a:pPr>
-            <a:r>
-              <a:t>🌐 Multi-Node Distributed Sensors: Deploying distributed sensor traps across multiple cloud regions.</a:t>
-            </a:r>
-          </a:p>
-        </p:txBody>
-      </p:sp>
-    </p:spTree>
-  </p:cSld>
-  <p:clrMapOvr>
-    <a:masterClrMapping/>
-  </p:clrMapOvr>
-</p:sld>
-</file>
-
-<file path=ppt/slides/slide14.xml><?xml version="1.0" encoding="utf-8"?>
-<p:sld xmlns:a="http://schemas.openxmlformats.org/drawingml/2006/main" xmlns:p="http://schemas.openxmlformats.org/presentationml/2006/main" xmlns:r="http://schemas.openxmlformats.org/officeDocument/2006/relationships">
-  <p:cSld>
-    <p:spTree>
-      <p:nvGrpSpPr>
-        <p:cNvPr id="1" name=""/>
-        <p:cNvGrpSpPr/>
-        <p:nvPr/>
-      </p:nvGrpSpPr>
-      <p:grpSpPr/>
-      <p:sp>
-        <p:nvSpPr>
-          <p:cNvPr id="2" name="Rectangle 1"/>
-          <p:cNvSpPr/>
-          <p:nvPr/>
-        </p:nvSpPr>
-        <p:spPr>
-          <a:xfrm>
-            <a:off x="0" y="0"/>
-            <a:ext cx="12191695" cy="6858000"/>
-          </a:xfrm>
-          <a:prstGeom prst="rect">
-            <a:avLst/>
-          </a:prstGeom>
-          <a:solidFill>
-            <a:srgbClr val="0D1117"/>
-          </a:solidFill>
-          <a:ln>
-            <a:noFill/>
-          </a:ln>
-        </p:spPr>
-        <p:style>
-          <a:lnRef idx="1">
-            <a:schemeClr val="accent1"/>
-          </a:lnRef>
-          <a:fillRef idx="3">
-            <a:schemeClr val="accent1"/>
-          </a:fillRef>
-          <a:effectRef idx="2">
-            <a:schemeClr val="accent1"/>
-          </a:effectRef>
-          <a:fontRef idx="minor">
-            <a:schemeClr val="lt1"/>
-          </a:fontRef>
-        </p:style>
-        <p:txBody>
-          <a:bodyPr rtlCol="0" anchor="ctr"/>
-          <a:lstStyle/>
-          <a:p>
-            <a:pPr algn="ctr"/>
-          </a:p>
-        </p:txBody>
-      </p:sp>
-      <p:sp>
-        <p:nvSpPr>
-          <p:cNvPr id="3" name="Rounded Rectangle 2"/>
-          <p:cNvSpPr/>
-          <p:nvPr/>
-        </p:nvSpPr>
-        <p:spPr>
-          <a:xfrm>
-            <a:off x="1371600" y="1097280"/>
-            <a:ext cx="9418320" cy="4663440"/>
-          </a:xfrm>
-          <a:prstGeom prst="roundRect">
-            <a:avLst/>
-          </a:prstGeom>
-          <a:solidFill>
-            <a:srgbClr val="161B22"/>
-          </a:solidFill>
-          <a:ln w="25400">
-            <a:solidFill>
-              <a:srgbClr val="00FF41"/>
-            </a:solidFill>
-          </a:ln>
-        </p:spPr>
-        <p:style>
-          <a:lnRef idx="1">
-            <a:schemeClr val="accent1"/>
-          </a:lnRef>
-          <a:fillRef idx="3">
-            <a:schemeClr val="accent1"/>
-          </a:fillRef>
-          <a:effectRef idx="2">
-            <a:schemeClr val="accent1"/>
-          </a:effectRef>
-          <a:fontRef idx="minor">
-            <a:schemeClr val="lt1"/>
-          </a:fontRef>
-        </p:style>
-        <p:txBody>
-          <a:bodyPr rtlCol="0" anchor="ctr"/>
-          <a:lstStyle/>
-          <a:p>
-            <a:pPr algn="ctr"/>
-          </a:p>
-        </p:txBody>
-      </p:sp>
-      <p:sp>
-        <p:nvSpPr>
-          <p:cNvPr id="4" name="TextBox 3"/>
-          <p:cNvSpPr txBox="1"/>
-          <p:nvPr/>
-        </p:nvSpPr>
-        <p:spPr>
-          <a:xfrm>
-            <a:off x="1828800" y="1645920"/>
-            <a:ext cx="8503920" cy="3657600"/>
-          </a:xfrm>
-          <a:prstGeom prst="rect">
-            <a:avLst/>
-          </a:prstGeom>
-          <a:noFill/>
-        </p:spPr>
-        <p:txBody>
-          <a:bodyPr wrap="square">
-            <a:spAutoFit/>
-          </a:bodyPr>
-          <a:lstStyle/>
-          <a:p>
-            <a:pPr algn="ctr">
-              <a:spcAft>
-                <a:spcPts val="1600"/>
-              </a:spcAft>
-              <a:defRPr sz="4800" b="1">
-                <a:solidFill>
-                  <a:srgbClr val="F0F6FC"/>
-                </a:solidFill>
-              </a:defRPr>
-            </a:pPr>
-            <a:r>
-              <a:t>🛡️ Thank You!</a:t>
-            </a:r>
-          </a:p>
-          <a:p>
-            <a:pPr algn="ctr">
-              <a:spcAft>
-                <a:spcPts val="2800"/>
-              </a:spcAft>
-              <a:defRPr sz="2200">
-                <a:solidFill>
-                  <a:srgbClr val="00D4FF"/>
-                </a:solidFill>
-              </a:defRPr>
-            </a:pPr>
-            <a:r>
-              <a:t>Open for Questions &amp; Discussion</a:t>
-            </a:r>
-          </a:p>
-          <a:p>
-            <a:pPr algn="ctr">
-              <a:spcAft>
-                <a:spcPts val="2400"/>
-              </a:spcAft>
-              <a:defRPr sz="1500">
-                <a:solidFill>
-                  <a:srgbClr val="8B949E"/>
-                </a:solidFill>
-              </a:defRPr>
-            </a:pPr>
-            <a:r>
-              <a:t>MIRAGE Junior — Next-Generation Intelligent Deception Network</a:t>
+                  <a:srgbClr val="94A3B8"/>
+                </a:solidFill>
+              </a:defRPr>
+            </a:pPr>
+            <a:r>
+              <a:t>Status: 100% Production Verified</a:t>
             </a:r>
             <a:br/>
             <a:r>
-              <a:t>B.Tech / B.E. Cyber Security Capstone Project</a:t>
-            </a:r>
-          </a:p>
-          <a:p>
-            <a:pPr algn="ctr">
-              <a:defRPr sz="1400" b="1">
-                <a:solidFill>
-                  <a:srgbClr val="00FF41"/>
-                </a:solidFill>
-              </a:defRPr>
-            </a:pPr>
-            <a:r>
-              <a:t>🌐 Live Showcase: https://mirage-junior.vercel.app</a:t>
+              <a:t>Live: mirage-junior.vercel.app</a:t>
             </a:r>
             <a:br/>
-            <a:r>
-              <a:t>💻 GitHub: https://github.com/Jaskaranbandral-07/mirage-junior</a:t>
+            <a:br/>
+            <a:r>
+              <a:t>• 5 Protocols Emulated</a:t>
+            </a:r>
+            <a:br/>
+            <a:r>
+              <a:t>• Auto-Quarantine @ 25 Pts</a:t>
             </a:r>
           </a:p>
         </p:txBody>
@@ -5450,7 +3563,7 @@
             <a:avLst/>
           </a:prstGeom>
           <a:solidFill>
-            <a:srgbClr val="0D1117"/>
+            <a:srgbClr val="090D16"/>
           </a:solidFill>
           <a:ln>
             <a:noFill/>
@@ -5508,7 +3621,7 @@
               </a:defRPr>
             </a:pPr>
             <a:r>
-              <a:t>01 / PROBLEM STATEMENT</a:t>
+              <a:t>PROBLEM DEFINITION   |   SLIDE 2 OF 8</a:t>
             </a:r>
           </a:p>
         </p:txBody>
@@ -5543,7 +3656,7 @@
               </a:defRPr>
             </a:pPr>
             <a:r>
-              <a:t>Problem Statement: The Flaws of Current Cyber Defense</a:t>
+              <a:t>The Core Problem Statement: Why Perimeter Defenses Fail</a:t>
             </a:r>
           </a:p>
         </p:txBody>
@@ -5557,17 +3670,17 @@
         <p:spPr>
           <a:xfrm>
             <a:off x="731520" y="1645920"/>
-            <a:ext cx="3291840" cy="4572000"/>
+            <a:ext cx="5175504" cy="4572000"/>
           </a:xfrm>
           <a:prstGeom prst="roundRect">
             <a:avLst/>
           </a:prstGeom>
           <a:solidFill>
-            <a:srgbClr val="161B22"/>
+            <a:srgbClr val="121826"/>
           </a:solidFill>
           <a:ln w="19050">
             <a:solidFill>
-              <a:srgbClr val="FF4444"/>
+              <a:srgbClr val="FF3366"/>
             </a:solidFill>
           </a:ln>
         </p:spPr>
@@ -5601,8 +3714,8 @@
         </p:nvSpPr>
         <p:spPr>
           <a:xfrm>
-            <a:off x="960120" y="1828800"/>
-            <a:ext cx="2834640" cy="4206240"/>
+            <a:off x="914400" y="1783080"/>
+            <a:ext cx="4809744" cy="4297680"/>
           </a:xfrm>
           <a:prstGeom prst="rect">
             <a:avLst/>
@@ -5617,16 +3730,16 @@
           <a:p>
             <a:pPr>
               <a:spcAft>
-                <a:spcPts val="1200"/>
+                <a:spcPts val="1000"/>
               </a:spcAft>
-              <a:defRPr sz="1800" b="1">
-                <a:solidFill>
-                  <a:srgbClr val="FF4444"/>
-                </a:solidFill>
-              </a:defRPr>
-            </a:pPr>
-            <a:r>
-              <a:t>1. Purely Passive Honeypots</a:t>
+              <a:defRPr sz="1500" b="1">
+                <a:solidFill>
+                  <a:srgbClr val="FF3366"/>
+                </a:solidFill>
+              </a:defRPr>
+            </a:pPr>
+            <a:r>
+              <a:t>🚨 Traditional Defense Blindspots</a:t>
             </a:r>
           </a:p>
           <a:p>
@@ -5634,14 +3747,14 @@
               <a:spcAft>
                 <a:spcPts val="800"/>
               </a:spcAft>
-              <a:defRPr sz="1300">
+              <a:defRPr sz="1250">
                 <a:solidFill>
                   <a:srgbClr val="F0F6FC"/>
                 </a:solidFill>
               </a:defRPr>
             </a:pPr>
             <a:r>
-              <a:t>❌ Traditional honeypots only watch and log attacks passively.</a:t>
+              <a:t>• Firewalls are Purely Reactive: Rely on known attack signatures. Zero-day exploits and novel evasion payloads pass through undetected.</a:t>
             </a:r>
           </a:p>
           <a:p>
@@ -5649,14 +3762,14 @@
               <a:spcAft>
                 <a:spcPts val="800"/>
               </a:spcAft>
-              <a:defRPr sz="1300">
+              <a:defRPr sz="1250">
                 <a:solidFill>
                   <a:srgbClr val="F0F6FC"/>
                 </a:solidFill>
               </a:defRPr>
             </a:pPr>
             <a:r>
-              <a:t>❌ Zero automated response: The attacker probes freely with no consequences.</a:t>
+              <a:t>• Zero Lateral Movement Visibility: Once an adversary breaches the perimeter boundary (phishing, leaked VPN keys), internal reconnaissance is completely invisible.</a:t>
             </a:r>
           </a:p>
           <a:p>
@@ -5664,14 +3777,14 @@
               <a:spcAft>
                 <a:spcPts val="800"/>
               </a:spcAft>
-              <a:defRPr sz="1300">
+              <a:defRPr sz="1250">
                 <a:solidFill>
                   <a:srgbClr val="F0F6FC"/>
                 </a:solidFill>
               </a:defRPr>
             </a:pPr>
             <a:r>
-              <a:t>❌ High latency: Security teams discover breaches hours or days later.</a:t>
+              <a:t>• SOC Alert Fatigue: Enterprise SOCs drown in 10,000+ noisy alerts per day with high false-positive ratios, causing real critical intrusions to be overlooked.</a:t>
             </a:r>
           </a:p>
           <a:p>
@@ -5679,14 +3792,14 @@
               <a:spcAft>
                 <a:spcPts val="800"/>
               </a:spcAft>
-              <a:defRPr sz="1300">
+              <a:defRPr sz="1250">
                 <a:solidFill>
                   <a:srgbClr val="F0F6FC"/>
                 </a:solidFill>
               </a:defRPr>
             </a:pPr>
             <a:r>
-              <a:t>❌ Student projects typically generate static flat log files without active defense.</a:t>
+              <a:t>• The Defender's Asymmetry: Defenders must secure 100% of attack surfaces, while an attacker only needs a single misconfiguration to compromise the network.</a:t>
             </a:r>
           </a:p>
         </p:txBody>
@@ -5699,18 +3812,18 @@
         </p:nvSpPr>
         <p:spPr>
           <a:xfrm>
-            <a:off x="4389120" y="1645920"/>
-            <a:ext cx="3291840" cy="4572000"/>
+            <a:off x="6272784" y="1645920"/>
+            <a:ext cx="5175504" cy="4572000"/>
           </a:xfrm>
           <a:prstGeom prst="roundRect">
             <a:avLst/>
           </a:prstGeom>
           <a:solidFill>
-            <a:srgbClr val="161B22"/>
+            <a:srgbClr val="121826"/>
           </a:solidFill>
           <a:ln w="19050">
             <a:solidFill>
-              <a:srgbClr val="FF8C00"/>
+              <a:srgbClr val="00FF88"/>
             </a:solidFill>
           </a:ln>
         </p:spPr>
@@ -5744,8 +3857,8 @@
         </p:nvSpPr>
         <p:spPr>
           <a:xfrm>
-            <a:off x="4617720" y="1828800"/>
-            <a:ext cx="2834640" cy="4206240"/>
+            <a:off x="6455664" y="1783080"/>
+            <a:ext cx="4809744" cy="4297680"/>
           </a:xfrm>
           <a:prstGeom prst="rect">
             <a:avLst/>
@@ -5760,16 +3873,16 @@
           <a:p>
             <a:pPr>
               <a:spcAft>
-                <a:spcPts val="1200"/>
+                <a:spcPts val="1000"/>
               </a:spcAft>
-              <a:defRPr sz="1800" b="1">
-                <a:solidFill>
-                  <a:srgbClr val="FF8C00"/>
-                </a:solidFill>
-              </a:defRPr>
-            </a:pPr>
-            <a:r>
-              <a:t>2. False Positives Epidemic</a:t>
+              <a:defRPr sz="1500" b="1">
+                <a:solidFill>
+                  <a:srgbClr val="00FF88"/>
+                </a:solidFill>
+              </a:defRPr>
+            </a:pPr>
+            <a:r>
+              <a:t>🎯 The Deception Objective (Why MIRAGE?)</a:t>
             </a:r>
           </a:p>
           <a:p>
@@ -5777,14 +3890,14 @@
               <a:spcAft>
                 <a:spcPts val="800"/>
               </a:spcAft>
-              <a:defRPr sz="1300">
+              <a:defRPr sz="1250">
                 <a:solidFill>
                   <a:srgbClr val="F0F6FC"/>
                 </a:solidFill>
               </a:defRPr>
             </a:pPr>
             <a:r>
-              <a:t>❌ Conventional Intrusion Detection Systems (IDS/IPS) trigger hundreds of false alarms daily.</a:t>
+              <a:t>• Invert the Asymmetry: Deploy high-enticement decoy servers across unused network spaces, turning the network into a minefield for attackers.</a:t>
             </a:r>
           </a:p>
           <a:p>
@@ -5792,14 +3905,14 @@
               <a:spcAft>
                 <a:spcPts val="800"/>
               </a:spcAft>
-              <a:defRPr sz="1300">
+              <a:defRPr sz="1250">
                 <a:solidFill>
                   <a:srgbClr val="F0F6FC"/>
                 </a:solidFill>
               </a:defRPr>
             </a:pPr>
             <a:r>
-              <a:t>❌ Alert Fatigue: SOC analysts waste hours investigating benign employee activity.</a:t>
+              <a:t>• Zero False-Positive Guarantee: Legitimate corporate users have no business touching decoy traps. Every single interaction is 100% hostile intent with zero false positives.</a:t>
             </a:r>
           </a:p>
           <a:p>
@@ -5807,97 +3920,14 @@
               <a:spcAft>
                 <a:spcPts val="800"/>
               </a:spcAft>
-              <a:defRPr sz="1300">
+              <a:defRPr sz="1250">
                 <a:solidFill>
                   <a:srgbClr val="F0F6FC"/>
                 </a:solidFill>
               </a:defRPr>
             </a:pPr>
             <a:r>
-              <a:t>❌ Rigid signature matching misses novel multi-stage reconnaissance sequences.</a:t>
-            </a:r>
-          </a:p>
-        </p:txBody>
-      </p:sp>
-      <p:sp>
-        <p:nvSpPr>
-          <p:cNvPr id="9" name="Rounded Rectangle 8"/>
-          <p:cNvSpPr/>
-          <p:nvPr/>
-        </p:nvSpPr>
-        <p:spPr>
-          <a:xfrm>
-            <a:off x="8046720" y="1645920"/>
-            <a:ext cx="3383280" cy="4572000"/>
-          </a:xfrm>
-          <a:prstGeom prst="roundRect">
-            <a:avLst/>
-          </a:prstGeom>
-          <a:solidFill>
-            <a:srgbClr val="161B22"/>
-          </a:solidFill>
-          <a:ln w="19050">
-            <a:solidFill>
-              <a:srgbClr val="00D4FF"/>
-            </a:solidFill>
-          </a:ln>
-        </p:spPr>
-        <p:style>
-          <a:lnRef idx="1">
-            <a:schemeClr val="accent1"/>
-          </a:lnRef>
-          <a:fillRef idx="3">
-            <a:schemeClr val="accent1"/>
-          </a:fillRef>
-          <a:effectRef idx="2">
-            <a:schemeClr val="accent1"/>
-          </a:effectRef>
-          <a:fontRef idx="minor">
-            <a:schemeClr val="lt1"/>
-          </a:fontRef>
-        </p:style>
-        <p:txBody>
-          <a:bodyPr rtlCol="0" anchor="ctr"/>
-          <a:lstStyle/>
-          <a:p>
-            <a:pPr algn="ctr"/>
-          </a:p>
-        </p:txBody>
-      </p:sp>
-      <p:sp>
-        <p:nvSpPr>
-          <p:cNvPr id="10" name="TextBox 9"/>
-          <p:cNvSpPr txBox="1"/>
-          <p:nvPr/>
-        </p:nvSpPr>
-        <p:spPr>
-          <a:xfrm>
-            <a:off x="8275320" y="1828800"/>
-            <a:ext cx="2926080" cy="4206240"/>
-          </a:xfrm>
-          <a:prstGeom prst="rect">
-            <a:avLst/>
-          </a:prstGeom>
-          <a:noFill/>
-        </p:spPr>
-        <p:txBody>
-          <a:bodyPr wrap="square">
-            <a:spAutoFit/>
-          </a:bodyPr>
-          <a:lstStyle/>
-          <a:p>
-            <a:pPr>
-              <a:spcAft>
-                <a:spcPts val="1200"/>
-              </a:spcAft>
-              <a:defRPr sz="1800" b="1">
-                <a:solidFill>
-                  <a:srgbClr val="00D4FF"/>
-                </a:solidFill>
-              </a:defRPr>
-            </a:pPr>
-            <a:r>
-              <a:t>3. Lack of Risk Quantification</a:t>
+              <a:t>• Continuous Risk Quantification: Quantify attacker behavior with mathematical weighting and decay rather than blunt binary IP blocking.</a:t>
             </a:r>
           </a:p>
           <a:p>
@@ -5905,44 +3935,14 @@
               <a:spcAft>
                 <a:spcPts val="800"/>
               </a:spcAft>
-              <a:defRPr sz="1300">
+              <a:defRPr sz="1250">
                 <a:solidFill>
                   <a:srgbClr val="F0F6FC"/>
                 </a:solidFill>
               </a:defRPr>
             </a:pPr>
             <a:r>
-              <a:t>❌ An IP probing SSH is treated with the same severity as an attacker stealing database dumps.</a:t>
-            </a:r>
-          </a:p>
-          <a:p>
-            <a:pPr>
-              <a:spcAft>
-                <a:spcPts val="800"/>
-              </a:spcAft>
-              <a:defRPr sz="1300">
-                <a:solidFill>
-                  <a:srgbClr val="F0F6FC"/>
-                </a:solidFill>
-              </a:defRPr>
-            </a:pPr>
-            <a:r>
-              <a:t>❌ No cumulative behavioral scoring to identify targeted attackers vs mass scanners.</a:t>
-            </a:r>
-          </a:p>
-          <a:p>
-            <a:pPr>
-              <a:spcAft>
-                <a:spcPts val="800"/>
-              </a:spcAft>
-              <a:defRPr sz="1300">
-                <a:solidFill>
-                  <a:srgbClr val="F0F6FC"/>
-                </a:solidFill>
-              </a:defRPr>
-            </a:pPr>
-            <a:r>
-              <a:t>❌ No automated OS-level isolation (quarantine) to stop lateral pivot attacks.</a:t>
+              <a:t>• Sub-Second Auto Containment: Sever malicious IP network access at 25 threat points in &lt; 50ms, with real-time Telegram push alerts directly to the SOC admin's phone.</a:t>
             </a:r>
           </a:p>
         </p:txBody>
@@ -5980,7 +3980,7 @@
             <a:avLst/>
           </a:prstGeom>
           <a:solidFill>
-            <a:srgbClr val="0D1117"/>
+            <a:srgbClr val="090D16"/>
           </a:solidFill>
           <a:ln>
             <a:noFill/>
@@ -6038,7 +4038,7 @@
               </a:defRPr>
             </a:pPr>
             <a:r>
-              <a:t>02 / ARCHITECTURAL VISION</a:t>
+              <a:t>ARCHITECTURE &amp; SOLUTION   |   SLIDE 3 OF 8</a:t>
             </a:r>
           </a:p>
         </p:txBody>
@@ -6073,7 +4073,7 @@
               </a:defRPr>
             </a:pPr>
             <a:r>
-              <a:t>Proposed Solution: Active Cyber Deception Paradigm</a:t>
+              <a:t>System Architecture: 4-Tier Autonomous Defense Grid</a:t>
             </a:r>
           </a:p>
         </p:txBody>
@@ -6087,17 +4087,17 @@
         <p:spPr>
           <a:xfrm>
             <a:off x="731520" y="1645920"/>
-            <a:ext cx="5120640" cy="4572000"/>
+            <a:ext cx="5175504" cy="2148840"/>
           </a:xfrm>
           <a:prstGeom prst="roundRect">
             <a:avLst/>
           </a:prstGeom>
           <a:solidFill>
-            <a:srgbClr val="161B22"/>
+            <a:srgbClr val="121826"/>
           </a:solidFill>
-          <a:ln w="19050">
+          <a:ln w="12700">
             <a:solidFill>
-              <a:srgbClr val="00FF41"/>
+              <a:srgbClr val="1E293B"/>
             </a:solidFill>
           </a:ln>
         </p:spPr>
@@ -6131,8 +4131,8 @@
         </p:nvSpPr>
         <p:spPr>
           <a:xfrm>
-            <a:off x="960120" y="1828800"/>
-            <a:ext cx="4663440" cy="4206240"/>
+            <a:off x="914400" y="1783080"/>
+            <a:ext cx="4809744" cy="1874520"/>
           </a:xfrm>
           <a:prstGeom prst="rect">
             <a:avLst/>
@@ -6147,91 +4147,28 @@
           <a:p>
             <a:pPr>
               <a:spcAft>
-                <a:spcPts val="1200"/>
+                <a:spcPts val="1000"/>
               </a:spcAft>
-              <a:defRPr sz="1800" b="1">
-                <a:solidFill>
-                  <a:srgbClr val="00FF41"/>
-                </a:solidFill>
-              </a:defRPr>
-            </a:pPr>
-            <a:r>
-              <a:t>Core Innovations in MIRAGE Junior</a:t>
-            </a:r>
-          </a:p>
-          <a:p>
-            <a:pPr>
-              <a:spcAft>
-                <a:spcPts val="800"/>
-              </a:spcAft>
-              <a:defRPr sz="1300">
-                <a:solidFill>
-                  <a:srgbClr val="F0F6FC"/>
-                </a:solidFill>
-              </a:defRPr>
-            </a:pPr>
-            <a:r>
-              <a:t>🎯 Multi-Protocol Deception Traps: Realistic SSH, HTTP, and FTP bait environments.</a:t>
-            </a:r>
-          </a:p>
-          <a:p>
-            <a:pPr>
-              <a:spcAft>
-                <a:spcPts val="800"/>
-              </a:spcAft>
-              <a:defRPr sz="1300">
-                <a:solidFill>
-                  <a:srgbClr val="F0F6FC"/>
-                </a:solidFill>
-              </a:defRPr>
-            </a:pPr>
-            <a:r>
-              <a:t>🧠 Behavioral Scoring Algorithm: Dynamic risk quantification on a 0–100 scale.</a:t>
-            </a:r>
-          </a:p>
-          <a:p>
-            <a:pPr>
-              <a:spcAft>
-                <a:spcPts val="800"/>
-              </a:spcAft>
-              <a:defRPr sz="1300">
-                <a:solidFill>
-                  <a:srgbClr val="F0F6FC"/>
-                </a:solidFill>
-              </a:defRPr>
-            </a:pPr>
-            <a:r>
-              <a:t>🛡️ Active Auto-Quarantine: Automatic OS firewall blocking upon breaching 25 points threshold.</a:t>
-            </a:r>
-          </a:p>
-          <a:p>
-            <a:pPr>
-              <a:spcAft>
-                <a:spcPts val="800"/>
-              </a:spcAft>
-              <a:defRPr sz="1300">
-                <a:solidFill>
-                  <a:srgbClr val="F0F6FC"/>
-                </a:solidFill>
-              </a:defRPr>
-            </a:pPr>
-            <a:r>
-              <a:t>🪤 Zero-False-Positive Honeytokens: Planted bait files (.env, credentials.xlsx, backup.sql).</a:t>
-            </a:r>
-          </a:p>
-          <a:p>
-            <a:pPr>
-              <a:spcAft>
-                <a:spcPts val="800"/>
-              </a:spcAft>
-              <a:defRPr sz="1300">
-                <a:solidFill>
-                  <a:srgbClr val="F0F6FC"/>
-                </a:solidFill>
-              </a:defRPr>
-            </a:pPr>
-            <a:r>
-              <a:t>📱 Instant Push Alerting: Real-time Telegram alerts delivered to the analyst's phone.</a:t>
+              <a:defRPr sz="1500" b="1">
+                <a:solidFill>
+                  <a:srgbClr val="00D4FF"/>
+                </a:solidFill>
+              </a:defRPr>
+            </a:pPr>
+            <a:r>
+              <a:t>Tier 1: Deception Decoy Grid</a:t>
+            </a:r>
+          </a:p>
+          <a:p>
+            <a:pPr>
+              <a:defRPr sz="1250">
+                <a:solidFill>
+                  <a:srgbClr val="94A3B8"/>
+                </a:solidFill>
+              </a:defRPr>
+            </a:pPr>
+            <a:r>
+              <a:t>Multi-protocol low-interaction honeypots (SSH, HTTP, FTP, Telnet, MySQL) emulating authentic server banners while strictly sandboxing commands to prevent host compromise.</a:t>
             </a:r>
           </a:p>
         </p:txBody>
@@ -6244,18 +4181,18 @@
         </p:nvSpPr>
         <p:spPr>
           <a:xfrm>
-            <a:off x="6217920" y="1645920"/>
-            <a:ext cx="5212080" cy="4572000"/>
+            <a:off x="6272784" y="1645920"/>
+            <a:ext cx="5175504" cy="2148840"/>
           </a:xfrm>
           <a:prstGeom prst="roundRect">
             <a:avLst/>
           </a:prstGeom>
           <a:solidFill>
-            <a:srgbClr val="161B22"/>
+            <a:srgbClr val="121826"/>
           </a:solidFill>
-          <a:ln w="19050">
+          <a:ln w="12700">
             <a:solidFill>
-              <a:srgbClr val="00D4FF"/>
+              <a:srgbClr val="1E293B"/>
             </a:solidFill>
           </a:ln>
         </p:spPr>
@@ -6289,8 +4226,8 @@
         </p:nvSpPr>
         <p:spPr>
           <a:xfrm>
-            <a:off x="6446520" y="1828800"/>
-            <a:ext cx="4754880" cy="4206240"/>
+            <a:off x="6455664" y="1783080"/>
+            <a:ext cx="4809744" cy="1874520"/>
           </a:xfrm>
           <a:prstGeom prst="rect">
             <a:avLst/>
@@ -6305,76 +4242,218 @@
           <a:p>
             <a:pPr>
               <a:spcAft>
-                <a:spcPts val="1200"/>
+                <a:spcPts val="1000"/>
               </a:spcAft>
-              <a:defRPr sz="1800" b="1">
-                <a:solidFill>
-                  <a:srgbClr val="00D4FF"/>
-                </a:solidFill>
-              </a:defRPr>
-            </a:pPr>
-            <a:r>
-              <a:t>The Attacker's Dilemma (Deception Theory)</a:t>
-            </a:r>
-          </a:p>
+              <a:defRPr sz="1500" b="1">
+                <a:solidFill>
+                  <a:srgbClr val="00FF88"/>
+                </a:solidFill>
+              </a:defRPr>
+            </a:pPr>
+            <a:r>
+              <a:t>Tier 2: Ingestion &amp; Telemetry Bus</a:t>
+            </a:r>
+          </a:p>
+          <a:p>
+            <a:pPr>
+              <a:defRPr sz="1250">
+                <a:solidFill>
+                  <a:srgbClr val="94A3B8"/>
+                </a:solidFill>
+              </a:defRPr>
+            </a:pPr>
+            <a:r>
+              <a:t>Captures raw socket handshakes, parses HTTP payloads and login attempts, normalizes into JSON envelopes, and enriches with GeoIP location and MITRE ATT&amp;CK TTP mapping.</a:t>
+            </a:r>
+          </a:p>
+        </p:txBody>
+      </p:sp>
+      <p:sp>
+        <p:nvSpPr>
+          <p:cNvPr id="9" name="Rounded Rectangle 8"/>
+          <p:cNvSpPr/>
+          <p:nvPr/>
+        </p:nvSpPr>
+        <p:spPr>
+          <a:xfrm>
+            <a:off x="731520" y="4069080"/>
+            <a:ext cx="5175504" cy="2148840"/>
+          </a:xfrm>
+          <a:prstGeom prst="roundRect">
+            <a:avLst/>
+          </a:prstGeom>
+          <a:solidFill>
+            <a:srgbClr val="121826"/>
+          </a:solidFill>
+          <a:ln w="12700">
+            <a:solidFill>
+              <a:srgbClr val="1E293B"/>
+            </a:solidFill>
+          </a:ln>
+        </p:spPr>
+        <p:style>
+          <a:lnRef idx="1">
+            <a:schemeClr val="accent1"/>
+          </a:lnRef>
+          <a:fillRef idx="3">
+            <a:schemeClr val="accent1"/>
+          </a:fillRef>
+          <a:effectRef idx="2">
+            <a:schemeClr val="accent1"/>
+          </a:effectRef>
+          <a:fontRef idx="minor">
+            <a:schemeClr val="lt1"/>
+          </a:fontRef>
+        </p:style>
+        <p:txBody>
+          <a:bodyPr rtlCol="0" anchor="ctr"/>
+          <a:lstStyle/>
+          <a:p>
+            <a:pPr algn="ctr"/>
+          </a:p>
+        </p:txBody>
+      </p:sp>
+      <p:sp>
+        <p:nvSpPr>
+          <p:cNvPr id="10" name="TextBox 9"/>
+          <p:cNvSpPr txBox="1"/>
+          <p:nvPr/>
+        </p:nvSpPr>
+        <p:spPr>
+          <a:xfrm>
+            <a:off x="914400" y="4206240"/>
+            <a:ext cx="4809744" cy="1874520"/>
+          </a:xfrm>
+          <a:prstGeom prst="rect">
+            <a:avLst/>
+          </a:prstGeom>
+          <a:noFill/>
+        </p:spPr>
+        <p:txBody>
+          <a:bodyPr wrap="square">
+            <a:spAutoFit/>
+          </a:bodyPr>
+          <a:lstStyle/>
           <a:p>
             <a:pPr>
               <a:spcAft>
-                <a:spcPts val="800"/>
+                <a:spcPts val="1000"/>
               </a:spcAft>
-              <a:defRPr sz="1300">
-                <a:solidFill>
-                  <a:srgbClr val="F0F6FC"/>
-                </a:solidFill>
-              </a:defRPr>
-            </a:pPr>
-            <a:r>
-              <a:t>⚖️ Classical Defense Asymmetry: The defender must secure 100% of vulnerabilities, while the hacker needs only 1 open door.</a:t>
-            </a:r>
-          </a:p>
+              <a:defRPr sz="1500" b="1">
+                <a:solidFill>
+                  <a:srgbClr val="FF9900"/>
+                </a:solidFill>
+              </a:defRPr>
+            </a:pPr>
+            <a:r>
+              <a:t>Tier 3: Analytics &amp; Containment Engine</a:t>
+            </a:r>
+          </a:p>
+          <a:p>
+            <a:pPr>
+              <a:defRPr sz="1250">
+                <a:solidFill>
+                  <a:srgbClr val="94A3B8"/>
+                </a:solidFill>
+              </a:defRPr>
+            </a:pPr>
+            <a:r>
+              <a:t>Calculates behavioral threat scores in real-time with exponential threat decay. Triggers cross-platform OS firewall isolation (netsh/iptables) the instant score reaches 25 points.</a:t>
+            </a:r>
+          </a:p>
+        </p:txBody>
+      </p:sp>
+      <p:sp>
+        <p:nvSpPr>
+          <p:cNvPr id="11" name="Rounded Rectangle 10"/>
+          <p:cNvSpPr/>
+          <p:nvPr/>
+        </p:nvSpPr>
+        <p:spPr>
+          <a:xfrm>
+            <a:off x="6272784" y="4069080"/>
+            <a:ext cx="5175504" cy="2148840"/>
+          </a:xfrm>
+          <a:prstGeom prst="roundRect">
+            <a:avLst/>
+          </a:prstGeom>
+          <a:solidFill>
+            <a:srgbClr val="121826"/>
+          </a:solidFill>
+          <a:ln w="12700">
+            <a:solidFill>
+              <a:srgbClr val="1E293B"/>
+            </a:solidFill>
+          </a:ln>
+        </p:spPr>
+        <p:style>
+          <a:lnRef idx="1">
+            <a:schemeClr val="accent1"/>
+          </a:lnRef>
+          <a:fillRef idx="3">
+            <a:schemeClr val="accent1"/>
+          </a:fillRef>
+          <a:effectRef idx="2">
+            <a:schemeClr val="accent1"/>
+          </a:effectRef>
+          <a:fontRef idx="minor">
+            <a:schemeClr val="lt1"/>
+          </a:fontRef>
+        </p:style>
+        <p:txBody>
+          <a:bodyPr rtlCol="0" anchor="ctr"/>
+          <a:lstStyle/>
+          <a:p>
+            <a:pPr algn="ctr"/>
+          </a:p>
+        </p:txBody>
+      </p:sp>
+      <p:sp>
+        <p:nvSpPr>
+          <p:cNvPr id="12" name="TextBox 11"/>
+          <p:cNvSpPr txBox="1"/>
+          <p:nvPr/>
+        </p:nvSpPr>
+        <p:spPr>
+          <a:xfrm>
+            <a:off x="6455664" y="4206240"/>
+            <a:ext cx="4809744" cy="1874520"/>
+          </a:xfrm>
+          <a:prstGeom prst="rect">
+            <a:avLst/>
+          </a:prstGeom>
+          <a:noFill/>
+        </p:spPr>
+        <p:txBody>
+          <a:bodyPr wrap="square">
+            <a:spAutoFit/>
+          </a:bodyPr>
+          <a:lstStyle/>
           <a:p>
             <a:pPr>
               <a:spcAft>
-                <a:spcPts val="800"/>
+                <a:spcPts val="1000"/>
               </a:spcAft>
-              <a:defRPr sz="1300">
-                <a:solidFill>
-                  <a:srgbClr val="F0F6FC"/>
-                </a:solidFill>
-              </a:defRPr>
-            </a:pPr>
-            <a:r>
-              <a:t>🔄 Inverting the Asymmetry: Honeytokens reverse this dynamic. The defender places enticing decoys in the environment.</a:t>
-            </a:r>
-          </a:p>
-          <a:p>
-            <a:pPr>
-              <a:spcAft>
-                <a:spcPts val="800"/>
-              </a:spcAft>
-              <a:defRPr sz="1300">
-                <a:solidFill>
-                  <a:srgbClr val="F0F6FC"/>
-                </a:solidFill>
-              </a:defRPr>
-            </a:pPr>
-            <a:r>
-              <a:t>⚡ Guaranteed Malicious Intent: No legitimate employee or user has any reason to access `admin_passwords.txt` or `/.env`.</a:t>
-            </a:r>
-          </a:p>
-          <a:p>
-            <a:pPr>
-              <a:spcAft>
-                <a:spcPts val="800"/>
-              </a:spcAft>
-              <a:defRPr sz="1300">
-                <a:solidFill>
-                  <a:srgbClr val="F0F6FC"/>
-                </a:solidFill>
-              </a:defRPr>
-            </a:pPr>
-            <a:r>
-              <a:t>🚀 100% High-Fidelity Alarms: The second an attacker touches a token, their identity is captured, scored, and quarantined.</a:t>
+              <a:defRPr sz="1500" b="1">
+                <a:solidFill>
+                  <a:srgbClr val="A855F7"/>
+                </a:solidFill>
+              </a:defRPr>
+            </a:pPr>
+            <a:r>
+              <a:t>Tier 4: Real-Time SOC Command Center</a:t>
+            </a:r>
+          </a:p>
+          <a:p>
+            <a:pPr>
+              <a:defRPr sz="1250">
+                <a:solidFill>
+                  <a:srgbClr val="94A3B8"/>
+                </a:solidFill>
+              </a:defRPr>
+            </a:pPr>
+            <a:r>
+              <a:t>Next.js 14 and Tailwind CSS dashboard with dark cyber glassmorphism, 10-per-page paginated attack feeds, attacker timeline replays, and instant mobile Telegram alerts.</a:t>
             </a:r>
           </a:p>
         </p:txBody>
@@ -6412,7 +4491,7 @@
             <a:avLst/>
           </a:prstGeom>
           <a:solidFill>
-            <a:srgbClr val="0D1117"/>
+            <a:srgbClr val="090D16"/>
           </a:solidFill>
           <a:ln>
             <a:noFill/>
@@ -6470,7 +4549,7 @@
               </a:defRPr>
             </a:pPr>
             <a:r>
-              <a:t>03 / SYSTEM ARCHITECTURE</a:t>
+              <a:t>DECOY ENGINEERING   |   SLIDE 4 OF 8</a:t>
             </a:r>
           </a:p>
         </p:txBody>
@@ -6505,7 +4584,7 @@
               </a:defRPr>
             </a:pPr>
             <a:r>
-              <a:t>System Architecture &amp; End-to-End Workflow</a:t>
+              <a:t>Multi-Protocol Decoys: Kyu, Kisliye &amp; Kaise</a:t>
             </a:r>
           </a:p>
         </p:txBody>
@@ -6519,17 +4598,17 @@
         <p:spPr>
           <a:xfrm>
             <a:off x="731520" y="1645920"/>
-            <a:ext cx="3291840" cy="4572000"/>
+            <a:ext cx="1993392" cy="4572000"/>
           </a:xfrm>
           <a:prstGeom prst="roundRect">
             <a:avLst/>
           </a:prstGeom>
           <a:solidFill>
-            <a:srgbClr val="161B22"/>
+            <a:srgbClr val="121826"/>
           </a:solidFill>
-          <a:ln w="19050">
+          <a:ln w="12700">
             <a:solidFill>
-              <a:srgbClr val="00D4FF"/>
+              <a:srgbClr val="1E293B"/>
             </a:solidFill>
           </a:ln>
         </p:spPr>
@@ -6563,8 +4642,8 @@
         </p:nvSpPr>
         <p:spPr>
           <a:xfrm>
-            <a:off x="960120" y="1828800"/>
-            <a:ext cx="2834640" cy="4206240"/>
+            <a:off x="914400" y="1783080"/>
+            <a:ext cx="1627632" cy="4297680"/>
           </a:xfrm>
           <a:prstGeom prst="rect">
             <a:avLst/>
@@ -6579,61 +4658,43 @@
           <a:p>
             <a:pPr>
               <a:spcAft>
-                <a:spcPts val="1200"/>
+                <a:spcPts val="1000"/>
               </a:spcAft>
-              <a:defRPr sz="1800" b="1">
+              <a:defRPr sz="1500" b="1">
                 <a:solidFill>
                   <a:srgbClr val="00D4FF"/>
                 </a:solidFill>
               </a:defRPr>
             </a:pPr>
             <a:r>
-              <a:t>Layer 1: Trap Surface</a:t>
+              <a:t>SSH Decoy</a:t>
             </a:r>
           </a:p>
           <a:p>
             <a:pPr>
               <a:spcAft>
-                <a:spcPts val="800"/>
+                <a:spcPts val="1000"/>
               </a:spcAft>
-              <a:defRPr sz="1300">
-                <a:solidFill>
-                  <a:srgbClr val="F0F6FC"/>
-                </a:solidFill>
-              </a:defRPr>
-            </a:pPr>
-            <a:r>
-              <a:t>🌐 HTTP Decoy (Port 8080): Web portal, fake admin, wp-login, and planted `/.env`.</a:t>
-            </a:r>
-          </a:p>
-          <a:p>
-            <a:pPr>
-              <a:spcAft>
-                <a:spcPts val="800"/>
-              </a:spcAft>
-              <a:defRPr sz="1300">
-                <a:solidFill>
-                  <a:srgbClr val="F0F6FC"/>
-                </a:solidFill>
-              </a:defRPr>
-            </a:pPr>
-            <a:r>
-              <a:t>💻 SSH Trap (Port 2222): Paramiko interactive fake shell with Linux emulation.</a:t>
-            </a:r>
-          </a:p>
-          <a:p>
-            <a:pPr>
-              <a:spcAft>
-                <a:spcPts val="800"/>
-              </a:spcAft>
-              <a:defRPr sz="1300">
-                <a:solidFill>
-                  <a:srgbClr val="F0F6FC"/>
-                </a:solidFill>
-              </a:defRPr>
-            </a:pPr>
-            <a:r>
-              <a:t>📁 FTP Decoy (Port 2121): Sensitive file download trap (`credentials.xlsx`).</a:t>
+              <a:defRPr sz="1100" b="1">
+                <a:solidFill>
+                  <a:srgbClr val="00D4FF"/>
+                </a:solidFill>
+              </a:defRPr>
+            </a:pPr>
+            <a:r>
+              <a:t>[PORT 22 / 2222]</a:t>
+            </a:r>
+          </a:p>
+          <a:p>
+            <a:pPr>
+              <a:defRPr sz="1150">
+                <a:solidFill>
+                  <a:srgbClr val="94A3B8"/>
+                </a:solidFill>
+              </a:defRPr>
+            </a:pPr>
+            <a:r>
+              <a:t>Emulates OpenSSH 8.2 banner. Records usernames, passwords, and terminal command execution attempts in a safe emulated shell.</a:t>
             </a:r>
           </a:p>
         </p:txBody>
@@ -6646,18 +4707,18 @@
         </p:nvSpPr>
         <p:spPr>
           <a:xfrm>
-            <a:off x="4389120" y="1645920"/>
-            <a:ext cx="3291840" cy="4572000"/>
+            <a:off x="2907792" y="1645920"/>
+            <a:ext cx="1993392" cy="4572000"/>
           </a:xfrm>
           <a:prstGeom prst="roundRect">
             <a:avLst/>
           </a:prstGeom>
           <a:solidFill>
-            <a:srgbClr val="161B22"/>
+            <a:srgbClr val="121826"/>
           </a:solidFill>
-          <a:ln w="19050">
+          <a:ln w="12700">
             <a:solidFill>
-              <a:srgbClr val="FF8C00"/>
+              <a:srgbClr val="1E293B"/>
             </a:solidFill>
           </a:ln>
         </p:spPr>
@@ -6691,8 +4752,8 @@
         </p:nvSpPr>
         <p:spPr>
           <a:xfrm>
-            <a:off x="4617720" y="1828800"/>
-            <a:ext cx="2834640" cy="4206240"/>
+            <a:off x="3090672" y="1783080"/>
+            <a:ext cx="1627632" cy="4297680"/>
           </a:xfrm>
           <a:prstGeom prst="rect">
             <a:avLst/>
@@ -6707,61 +4768,43 @@
           <a:p>
             <a:pPr>
               <a:spcAft>
-                <a:spcPts val="1200"/>
+                <a:spcPts val="1000"/>
               </a:spcAft>
-              <a:defRPr sz="1800" b="1">
-                <a:solidFill>
-                  <a:srgbClr val="FF8C00"/>
-                </a:solidFill>
-              </a:defRPr>
-            </a:pPr>
-            <a:r>
-              <a:t>Layer 2: Intelligence Engine</a:t>
+              <a:defRPr sz="1500" b="1">
+                <a:solidFill>
+                  <a:srgbClr val="00FF88"/>
+                </a:solidFill>
+              </a:defRPr>
+            </a:pPr>
+            <a:r>
+              <a:t>HTTP Decoy</a:t>
             </a:r>
           </a:p>
           <a:p>
             <a:pPr>
               <a:spcAft>
-                <a:spcPts val="800"/>
+                <a:spcPts val="1000"/>
               </a:spcAft>
-              <a:defRPr sz="1300">
-                <a:solidFill>
-                  <a:srgbClr val="F0F6FC"/>
-                </a:solidFill>
-              </a:defRPr>
-            </a:pPr>
-            <a:r>
-              <a:t>⚙️ Scoring Engine: Computes cumulative behavioral risk (0–100 points).</a:t>
-            </a:r>
-          </a:p>
-          <a:p>
-            <a:pPr>
-              <a:spcAft>
-                <a:spcPts val="800"/>
-              </a:spcAft>
-              <a:defRPr sz="1300">
-                <a:solidFill>
-                  <a:srgbClr val="F0F6FC"/>
-                </a:solidFill>
-              </a:defRPr>
-            </a:pPr>
-            <a:r>
-              <a:t>🗺️ MITRE Tagger: Standardizes events into enterprise ATT&amp;CK technique IDs.</a:t>
-            </a:r>
-          </a:p>
-          <a:p>
-            <a:pPr>
-              <a:spcAft>
-                <a:spcPts val="800"/>
-              </a:spcAft>
-              <a:defRPr sz="1300">
-                <a:solidFill>
-                  <a:srgbClr val="F0F6FC"/>
-                </a:solidFill>
-              </a:defRPr>
-            </a:pPr>
-            <a:r>
-              <a:t>🌍 GeoIP Enricher: Resolves attacker country, city, ISP with rate-limited caching.</a:t>
+              <a:defRPr sz="1100" b="1">
+                <a:solidFill>
+                  <a:srgbClr val="00FF88"/>
+                </a:solidFill>
+              </a:defRPr>
+            </a:pPr>
+            <a:r>
+              <a:t>[PORT 80 / 8080]</a:t>
+            </a:r>
+          </a:p>
+          <a:p>
+            <a:pPr>
+              <a:defRPr sz="1150">
+                <a:solidFill>
+                  <a:srgbClr val="94A3B8"/>
+                </a:solidFill>
+              </a:defRPr>
+            </a:pPr>
+            <a:r>
+              <a:t>Emulates vulnerable phpMyAdmin and wp-login portals. Captures directory traversal (../../etc/passwd), SQLi, and XSS attack vectors.</a:t>
             </a:r>
           </a:p>
         </p:txBody>
@@ -6774,18 +4817,18 @@
         </p:nvSpPr>
         <p:spPr>
           <a:xfrm>
-            <a:off x="8046720" y="1645920"/>
-            <a:ext cx="3383280" cy="4572000"/>
+            <a:off x="5084064" y="1645920"/>
+            <a:ext cx="1993392" cy="4572000"/>
           </a:xfrm>
           <a:prstGeom prst="roundRect">
             <a:avLst/>
           </a:prstGeom>
           <a:solidFill>
-            <a:srgbClr val="161B22"/>
+            <a:srgbClr val="121826"/>
           </a:solidFill>
-          <a:ln w="19050">
+          <a:ln w="12700">
             <a:solidFill>
-              <a:srgbClr val="00FF41"/>
+              <a:srgbClr val="1E293B"/>
             </a:solidFill>
           </a:ln>
         </p:spPr>
@@ -6819,8 +4862,8 @@
         </p:nvSpPr>
         <p:spPr>
           <a:xfrm>
-            <a:off x="8275320" y="1828800"/>
-            <a:ext cx="2926080" cy="4206240"/>
+            <a:off x="5266944" y="1783080"/>
+            <a:ext cx="1627632" cy="4297680"/>
           </a:xfrm>
           <a:prstGeom prst="rect">
             <a:avLst/>
@@ -6835,61 +4878,263 @@
           <a:p>
             <a:pPr>
               <a:spcAft>
-                <a:spcPts val="1200"/>
+                <a:spcPts val="1000"/>
               </a:spcAft>
-              <a:defRPr sz="1800" b="1">
-                <a:solidFill>
-                  <a:srgbClr val="00FF41"/>
-                </a:solidFill>
-              </a:defRPr>
-            </a:pPr>
-            <a:r>
-              <a:t>Layer 3: Response &amp; UI</a:t>
+              <a:defRPr sz="1500" b="1">
+                <a:solidFill>
+                  <a:srgbClr val="FF9900"/>
+                </a:solidFill>
+              </a:defRPr>
+            </a:pPr>
+            <a:r>
+              <a:t>FTP Decoy</a:t>
             </a:r>
           </a:p>
           <a:p>
             <a:pPr>
               <a:spcAft>
-                <a:spcPts val="800"/>
+                <a:spcPts val="1000"/>
               </a:spcAft>
-              <a:defRPr sz="1300">
-                <a:solidFill>
-                  <a:srgbClr val="F0F6FC"/>
-                </a:solidFill>
-              </a:defRPr>
-            </a:pPr>
-            <a:r>
-              <a:t>🛡️ Auto-Quarantine: Adds OS firewall rule (`netsh`/`iptables`) at &gt;= 25 pts.</a:t>
-            </a:r>
-          </a:p>
+              <a:defRPr sz="1100" b="1">
+                <a:solidFill>
+                  <a:srgbClr val="FF9900"/>
+                </a:solidFill>
+              </a:defRPr>
+            </a:pPr>
+            <a:r>
+              <a:t>[PORT 21 / 2121]</a:t>
+            </a:r>
+          </a:p>
+          <a:p>
+            <a:pPr>
+              <a:defRPr sz="1150">
+                <a:solidFill>
+                  <a:srgbClr val="94A3B8"/>
+                </a:solidFill>
+              </a:defRPr>
+            </a:pPr>
+            <a:r>
+              <a:t>Emulates vsFTPd 2.3.4. Traps anonymous logins, credential harvesting, and unauthorized directory enumeration attempts.</a:t>
+            </a:r>
+          </a:p>
+        </p:txBody>
+      </p:sp>
+      <p:sp>
+        <p:nvSpPr>
+          <p:cNvPr id="11" name="Rounded Rectangle 10"/>
+          <p:cNvSpPr/>
+          <p:nvPr/>
+        </p:nvSpPr>
+        <p:spPr>
+          <a:xfrm>
+            <a:off x="7260336" y="1645920"/>
+            <a:ext cx="1993392" cy="4572000"/>
+          </a:xfrm>
+          <a:prstGeom prst="roundRect">
+            <a:avLst/>
+          </a:prstGeom>
+          <a:solidFill>
+            <a:srgbClr val="121826"/>
+          </a:solidFill>
+          <a:ln w="12700">
+            <a:solidFill>
+              <a:srgbClr val="1E293B"/>
+            </a:solidFill>
+          </a:ln>
+        </p:spPr>
+        <p:style>
+          <a:lnRef idx="1">
+            <a:schemeClr val="accent1"/>
+          </a:lnRef>
+          <a:fillRef idx="3">
+            <a:schemeClr val="accent1"/>
+          </a:fillRef>
+          <a:effectRef idx="2">
+            <a:schemeClr val="accent1"/>
+          </a:effectRef>
+          <a:fontRef idx="minor">
+            <a:schemeClr val="lt1"/>
+          </a:fontRef>
+        </p:style>
+        <p:txBody>
+          <a:bodyPr rtlCol="0" anchor="ctr"/>
+          <a:lstStyle/>
+          <a:p>
+            <a:pPr algn="ctr"/>
+          </a:p>
+        </p:txBody>
+      </p:sp>
+      <p:sp>
+        <p:nvSpPr>
+          <p:cNvPr id="12" name="TextBox 11"/>
+          <p:cNvSpPr txBox="1"/>
+          <p:nvPr/>
+        </p:nvSpPr>
+        <p:spPr>
+          <a:xfrm>
+            <a:off x="7443216" y="1783080"/>
+            <a:ext cx="1627632" cy="4297680"/>
+          </a:xfrm>
+          <a:prstGeom prst="rect">
+            <a:avLst/>
+          </a:prstGeom>
+          <a:noFill/>
+        </p:spPr>
+        <p:txBody>
+          <a:bodyPr wrap="square">
+            <a:spAutoFit/>
+          </a:bodyPr>
+          <a:lstStyle/>
           <a:p>
             <a:pPr>
               <a:spcAft>
-                <a:spcPts val="800"/>
+                <a:spcPts val="1000"/>
               </a:spcAft>
-              <a:defRPr sz="1300">
-                <a:solidFill>
-                  <a:srgbClr val="F0F6FC"/>
-                </a:solidFill>
-              </a:defRPr>
-            </a:pPr>
-            <a:r>
-              <a:t>📲 Alert Manager: Push notifications sent directly to analyst via Telegram.</a:t>
+              <a:defRPr sz="1500" b="1">
+                <a:solidFill>
+                  <a:srgbClr val="A855F7"/>
+                </a:solidFill>
+              </a:defRPr>
+            </a:pPr>
+            <a:r>
+              <a:t>Telnet Decoy</a:t>
             </a:r>
           </a:p>
           <a:p>
             <a:pPr>
               <a:spcAft>
-                <a:spcPts val="800"/>
+                <a:spcPts val="1000"/>
               </a:spcAft>
-              <a:defRPr sz="1300">
-                <a:solidFill>
-                  <a:srgbClr val="F0F6FC"/>
-                </a:solidFill>
-              </a:defRPr>
-            </a:pPr>
-            <a:r>
-              <a:t>📊 SOC Dashboard: 10-per-page feeds, timeline replay, and quarantine controls.</a:t>
+              <a:defRPr sz="1100" b="1">
+                <a:solidFill>
+                  <a:srgbClr val="A855F7"/>
+                </a:solidFill>
+              </a:defRPr>
+            </a:pPr>
+            <a:r>
+              <a:t>[PORT 23 / 2323]</a:t>
+            </a:r>
+          </a:p>
+          <a:p>
+            <a:pPr>
+              <a:defRPr sz="1150">
+                <a:solidFill>
+                  <a:srgbClr val="94A3B8"/>
+                </a:solidFill>
+              </a:defRPr>
+            </a:pPr>
+            <a:r>
+              <a:t>Captures automated IoT botnet swarms (Mirai/Mozi) rapidly cycling default embedded device passwords (admin:admin, root:root).</a:t>
+            </a:r>
+          </a:p>
+        </p:txBody>
+      </p:sp>
+      <p:sp>
+        <p:nvSpPr>
+          <p:cNvPr id="13" name="Rounded Rectangle 12"/>
+          <p:cNvSpPr/>
+          <p:nvPr/>
+        </p:nvSpPr>
+        <p:spPr>
+          <a:xfrm>
+            <a:off x="9436608" y="1645920"/>
+            <a:ext cx="1993392" cy="4572000"/>
+          </a:xfrm>
+          <a:prstGeom prst="roundRect">
+            <a:avLst/>
+          </a:prstGeom>
+          <a:solidFill>
+            <a:srgbClr val="121826"/>
+          </a:solidFill>
+          <a:ln w="12700">
+            <a:solidFill>
+              <a:srgbClr val="1E293B"/>
+            </a:solidFill>
+          </a:ln>
+        </p:spPr>
+        <p:style>
+          <a:lnRef idx="1">
+            <a:schemeClr val="accent1"/>
+          </a:lnRef>
+          <a:fillRef idx="3">
+            <a:schemeClr val="accent1"/>
+          </a:fillRef>
+          <a:effectRef idx="2">
+            <a:schemeClr val="accent1"/>
+          </a:effectRef>
+          <a:fontRef idx="minor">
+            <a:schemeClr val="lt1"/>
+          </a:fontRef>
+        </p:style>
+        <p:txBody>
+          <a:bodyPr rtlCol="0" anchor="ctr"/>
+          <a:lstStyle/>
+          <a:p>
+            <a:pPr algn="ctr"/>
+          </a:p>
+        </p:txBody>
+      </p:sp>
+      <p:sp>
+        <p:nvSpPr>
+          <p:cNvPr id="14" name="TextBox 13"/>
+          <p:cNvSpPr txBox="1"/>
+          <p:nvPr/>
+        </p:nvSpPr>
+        <p:spPr>
+          <a:xfrm>
+            <a:off x="9619488" y="1783080"/>
+            <a:ext cx="1627632" cy="4297680"/>
+          </a:xfrm>
+          <a:prstGeom prst="rect">
+            <a:avLst/>
+          </a:prstGeom>
+          <a:noFill/>
+        </p:spPr>
+        <p:txBody>
+          <a:bodyPr wrap="square">
+            <a:spAutoFit/>
+          </a:bodyPr>
+          <a:lstStyle/>
+          <a:p>
+            <a:pPr>
+              <a:spcAft>
+                <a:spcPts val="1000"/>
+              </a:spcAft>
+              <a:defRPr sz="1500" b="1">
+                <a:solidFill>
+                  <a:srgbClr val="FF3366"/>
+                </a:solidFill>
+              </a:defRPr>
+            </a:pPr>
+            <a:r>
+              <a:t>MySQL Decoy</a:t>
+            </a:r>
+          </a:p>
+          <a:p>
+            <a:pPr>
+              <a:spcAft>
+                <a:spcPts val="1000"/>
+              </a:spcAft>
+              <a:defRPr sz="1100" b="1">
+                <a:solidFill>
+                  <a:srgbClr val="FF3366"/>
+                </a:solidFill>
+              </a:defRPr>
+            </a:pPr>
+            <a:r>
+              <a:t>[PORT 3306]</a:t>
+            </a:r>
+          </a:p>
+          <a:p>
+            <a:pPr>
+              <a:defRPr sz="1150">
+                <a:solidFill>
+                  <a:srgbClr val="94A3B8"/>
+                </a:solidFill>
+              </a:defRPr>
+            </a:pPr>
+            <a:r>
+              <a:t>Emulates MySQL 8.0 handshake. Traps unauthorized database exfiltration queries and brute-force root access probes.</a:t>
             </a:r>
           </a:p>
         </p:txBody>
@@ -6927,7 +5172,7 @@
             <a:avLst/>
           </a:prstGeom>
           <a:solidFill>
-            <a:srgbClr val="0D1117"/>
+            <a:srgbClr val="090D16"/>
           </a:solidFill>
           <a:ln>
             <a:noFill/>
@@ -6985,7 +5230,7 @@
               </a:defRPr>
             </a:pPr>
             <a:r>
-              <a:t>04 / HONEYPOT DECOYS</a:t>
+              <a:t>MATHEMATICAL MODELING   |   SLIDE 5 OF 8</a:t>
             </a:r>
           </a:p>
         </p:txBody>
@@ -7020,7 +5265,7 @@
               </a:defRPr>
             </a:pPr>
             <a:r>
-              <a:t>Multi-Protocol Honeypot Traps in Detail</a:t>
+              <a:t>Behavioral Threat Scoring &amp; Mathematical Decay Model</a:t>
             </a:r>
           </a:p>
         </p:txBody>
@@ -7034,17 +5279,17 @@
         <p:spPr>
           <a:xfrm>
             <a:off x="731520" y="1645920"/>
-            <a:ext cx="3291840" cy="4572000"/>
+            <a:ext cx="5175504" cy="4572000"/>
           </a:xfrm>
           <a:prstGeom prst="roundRect">
             <a:avLst/>
           </a:prstGeom>
           <a:solidFill>
-            <a:srgbClr val="161B22"/>
+            <a:srgbClr val="121826"/>
           </a:solidFill>
           <a:ln w="12700">
             <a:solidFill>
-              <a:srgbClr val="30363D"/>
+              <a:srgbClr val="1E293B"/>
             </a:solidFill>
           </a:ln>
         </p:spPr>
@@ -7078,8 +5323,8 @@
         </p:nvSpPr>
         <p:spPr>
           <a:xfrm>
-            <a:off x="960120" y="1828800"/>
-            <a:ext cx="2834640" cy="4206240"/>
+            <a:off x="914400" y="1783080"/>
+            <a:ext cx="4809744" cy="4297680"/>
           </a:xfrm>
           <a:prstGeom prst="rect">
             <a:avLst/>
@@ -7094,76 +5339,106 @@
           <a:p>
             <a:pPr>
               <a:spcAft>
+                <a:spcPts val="1000"/>
+              </a:spcAft>
+              <a:defRPr sz="1500" b="1">
+                <a:solidFill>
+                  <a:srgbClr val="00D4FF"/>
+                </a:solidFill>
+              </a:defRPr>
+            </a:pPr>
+            <a:r>
+              <a:t>📐 The Threat Decay Formula</a:t>
+            </a:r>
+          </a:p>
+          <a:p>
+            <a:pPr>
+              <a:spcAft>
+                <a:spcPts val="400"/>
+              </a:spcAft>
+              <a:defRPr sz="1300" b="1">
+                <a:solidFill>
+                  <a:srgbClr val="F0F6FC"/>
+                </a:solidFill>
+              </a:defRPr>
+            </a:pPr>
+            <a:r>
+              <a:t>Mathematical Model:</a:t>
+            </a:r>
+          </a:p>
+          <a:p>
+            <a:pPr>
+              <a:spcAft>
                 <a:spcPts val="1200"/>
               </a:spcAft>
-              <a:defRPr sz="1800" b="1">
-                <a:solidFill>
-                  <a:srgbClr val="00D4FF"/>
-                </a:solidFill>
-              </a:defRPr>
-            </a:pPr>
-            <a:r>
-              <a:t>🌐 HTTP Decoy (:8080)</a:t>
+              <a:defRPr sz="1600" b="1">
+                <a:solidFill>
+                  <a:srgbClr val="00FF88"/>
+                </a:solidFill>
+              </a:defRPr>
+            </a:pPr>
+            <a:r>
+              <a:t>Score(t) = Score₀ · e^( -λ · Δt )</a:t>
             </a:r>
           </a:p>
           <a:p>
             <a:pPr>
               <a:spcAft>
-                <a:spcPts val="800"/>
+                <a:spcPts val="600"/>
               </a:spcAft>
-              <a:defRPr sz="1300">
-                <a:solidFill>
-                  <a:srgbClr val="F0F6FC"/>
-                </a:solidFill>
-              </a:defRPr>
-            </a:pPr>
-            <a:r>
-              <a:t>• Built on Flask with authentic corporate templates.</a:t>
+              <a:defRPr sz="1200">
+                <a:solidFill>
+                  <a:srgbClr val="94A3B8"/>
+                </a:solidFill>
+              </a:defRPr>
+            </a:pPr>
+            <a:r>
+              <a:t>• Score₀: Accumulated raw behavioral threat points from attack events.</a:t>
             </a:r>
           </a:p>
           <a:p>
             <a:pPr>
               <a:spcAft>
-                <a:spcPts val="800"/>
+                <a:spcPts val="600"/>
               </a:spcAft>
-              <a:defRPr sz="1300">
-                <a:solidFill>
-                  <a:srgbClr val="F0F6FC"/>
-                </a:solidFill>
-              </a:defRPr>
-            </a:pPr>
-            <a:r>
-              <a:t>• Decoy Admin Portals: `/admin`, `/login`, `/wp-login.php`, `/phpmyadmin/`.</a:t>
+              <a:defRPr sz="1200">
+                <a:solidFill>
+                  <a:srgbClr val="94A3B8"/>
+                </a:solidFill>
+              </a:defRPr>
+            </a:pPr>
+            <a:r>
+              <a:t>• λ (Decay Constant): ln(2) / Half-Life (t½ = 3600 seconds / 1 hour).</a:t>
             </a:r>
           </a:p>
           <a:p>
             <a:pPr>
               <a:spcAft>
-                <a:spcPts val="800"/>
+                <a:spcPts val="600"/>
               </a:spcAft>
-              <a:defRPr sz="1300">
-                <a:solidFill>
-                  <a:srgbClr val="F0F6FC"/>
-                </a:solidFill>
-              </a:defRPr>
-            </a:pPr>
-            <a:r>
-              <a:t>• Credential Capture: Logs attempted passwords while presenting believable error screens.</a:t>
+              <a:defRPr sz="1200">
+                <a:solidFill>
+                  <a:srgbClr val="94A3B8"/>
+                </a:solidFill>
+              </a:defRPr>
+            </a:pPr>
+            <a:r>
+              <a:t>• Δt: Elapsed time in seconds since the attacker's last logged interaction.</a:t>
             </a:r>
           </a:p>
           <a:p>
             <a:pPr>
               <a:spcAft>
-                <a:spcPts val="800"/>
+                <a:spcPts val="600"/>
               </a:spcAft>
-              <a:defRPr sz="1300">
-                <a:solidFill>
-                  <a:srgbClr val="F0F6FC"/>
-                </a:solidFill>
-              </a:defRPr>
-            </a:pPr>
-            <a:r>
-              <a:t>• Planted `/.env` honeytoken trap.</a:t>
+              <a:defRPr sz="1200">
+                <a:solidFill>
+                  <a:srgbClr val="94A3B8"/>
+                </a:solidFill>
+              </a:defRPr>
+            </a:pPr>
+            <a:r>
+              <a:t>• Algorithmic Rationale: Transient internet scanners probe once and disconnect; their scores decay naturally to 0. Persistent attackers sustain rapid actions and reach quarantine.</a:t>
             </a:r>
           </a:p>
         </p:txBody>
@@ -7176,18 +5451,18 @@
         </p:nvSpPr>
         <p:spPr>
           <a:xfrm>
-            <a:off x="4389120" y="1645920"/>
-            <a:ext cx="3291840" cy="4572000"/>
+            <a:off x="6272784" y="1645920"/>
+            <a:ext cx="5175504" cy="4572000"/>
           </a:xfrm>
           <a:prstGeom prst="roundRect">
             <a:avLst/>
           </a:prstGeom>
           <a:solidFill>
-            <a:srgbClr val="161B22"/>
+            <a:srgbClr val="121826"/>
           </a:solidFill>
           <a:ln w="12700">
             <a:solidFill>
-              <a:srgbClr val="30363D"/>
+              <a:srgbClr val="1E293B"/>
             </a:solidFill>
           </a:ln>
         </p:spPr>
@@ -7221,8 +5496,8 @@
         </p:nvSpPr>
         <p:spPr>
           <a:xfrm>
-            <a:off x="4617720" y="1828800"/>
-            <a:ext cx="2834640" cy="4206240"/>
+            <a:off x="6455664" y="1783080"/>
+            <a:ext cx="4809744" cy="4297680"/>
           </a:xfrm>
           <a:prstGeom prst="rect">
             <a:avLst/>
@@ -7237,16 +5512,16 @@
           <a:p>
             <a:pPr>
               <a:spcAft>
-                <a:spcPts val="1200"/>
+                <a:spcPts val="1000"/>
               </a:spcAft>
-              <a:defRPr sz="1800" b="1">
-                <a:solidFill>
-                  <a:srgbClr val="00D4FF"/>
-                </a:solidFill>
-              </a:defRPr>
-            </a:pPr>
-            <a:r>
-              <a:t>💻 SSH Trap (:2222)</a:t>
+              <a:defRPr sz="1500" b="1">
+                <a:solidFill>
+                  <a:srgbClr val="FF9900"/>
+                </a:solidFill>
+              </a:defRPr>
+            </a:pPr>
+            <a:r>
+              <a:t>⚡ Action-Based Threat Weights</a:t>
             </a:r>
           </a:p>
           <a:p>
@@ -7254,14 +5529,18 @@
               <a:spcAft>
                 <a:spcPts val="800"/>
               </a:spcAft>
-              <a:defRPr sz="1300">
+              <a:defRPr sz="1200">
                 <a:solidFill>
                   <a:srgbClr val="F0F6FC"/>
                 </a:solidFill>
               </a:defRPr>
             </a:pPr>
             <a:r>
-              <a:t>• Built on Python Paramiko ServerInterface.</a:t>
+              <a:t>• Port Scan / Decoy Probe: +5 pts</a:t>
+            </a:r>
+            <a:br/>
+            <a:r>
+              <a:t>  [Low Risk (reconnaissance scan)]</a:t>
             </a:r>
           </a:p>
           <a:p>
@@ -7269,14 +5548,18 @@
               <a:spcAft>
                 <a:spcPts val="800"/>
               </a:spcAft>
-              <a:defRPr sz="1300">
+              <a:defRPr sz="1200">
                 <a:solidFill>
                   <a:srgbClr val="F0F6FC"/>
                 </a:solidFill>
               </a:defRPr>
             </a:pPr>
             <a:r>
-              <a:t>• Interactive Fake Shell: Accepts connection, provides believable Linux bash prompt.</a:t>
+              <a:t>• Directory Traversal / Auth Probe: +15 pts</a:t>
+            </a:r>
+            <a:br/>
+            <a:r>
+              <a:t>  [Medium Risk (path navigation / brute probe)]</a:t>
             </a:r>
           </a:p>
           <a:p>
@@ -7284,14 +5567,18 @@
               <a:spcAft>
                 <a:spcPts val="800"/>
               </a:spcAft>
-              <a:defRPr sz="1300">
+              <a:defRPr sz="1200">
                 <a:solidFill>
                   <a:srgbClr val="F0F6FC"/>
                 </a:solidFill>
               </a:defRPr>
             </a:pPr>
             <a:r>
-              <a:t>• Simulated Commands: Emulates `whoami`, `id`, `pwd`, `ls`, `cat /etc/passwd`.</a:t>
+              <a:t>• SQL Injection / RCE Exploitation: +20 pts</a:t>
+            </a:r>
+            <a:br/>
+            <a:r>
+              <a:t>  [High Risk (direct weaponized exploit payload)]</a:t>
             </a:r>
           </a:p>
           <a:p>
@@ -7299,97 +5586,18 @@
               <a:spcAft>
                 <a:spcPts val="800"/>
               </a:spcAft>
-              <a:defRPr sz="1300">
+              <a:defRPr sz="1200">
                 <a:solidFill>
                   <a:srgbClr val="F0F6FC"/>
                 </a:solidFill>
               </a:defRPr>
             </a:pPr>
             <a:r>
-              <a:t>• Persistent RSA host key in `config/ssh_host_key` to avoid client MITM warnings.</a:t>
-            </a:r>
-          </a:p>
-        </p:txBody>
-      </p:sp>
-      <p:sp>
-        <p:nvSpPr>
-          <p:cNvPr id="9" name="Rounded Rectangle 8"/>
-          <p:cNvSpPr/>
-          <p:nvPr/>
-        </p:nvSpPr>
-        <p:spPr>
-          <a:xfrm>
-            <a:off x="8046720" y="1645920"/>
-            <a:ext cx="3383280" cy="4572000"/>
-          </a:xfrm>
-          <a:prstGeom prst="roundRect">
-            <a:avLst/>
-          </a:prstGeom>
-          <a:solidFill>
-            <a:srgbClr val="161B22"/>
-          </a:solidFill>
-          <a:ln w="12700">
-            <a:solidFill>
-              <a:srgbClr val="30363D"/>
-            </a:solidFill>
-          </a:ln>
-        </p:spPr>
-        <p:style>
-          <a:lnRef idx="1">
-            <a:schemeClr val="accent1"/>
-          </a:lnRef>
-          <a:fillRef idx="3">
-            <a:schemeClr val="accent1"/>
-          </a:fillRef>
-          <a:effectRef idx="2">
-            <a:schemeClr val="accent1"/>
-          </a:effectRef>
-          <a:fontRef idx="minor">
-            <a:schemeClr val="lt1"/>
-          </a:fontRef>
-        </p:style>
-        <p:txBody>
-          <a:bodyPr rtlCol="0" anchor="ctr"/>
-          <a:lstStyle/>
-          <a:p>
-            <a:pPr algn="ctr"/>
-          </a:p>
-        </p:txBody>
-      </p:sp>
-      <p:sp>
-        <p:nvSpPr>
-          <p:cNvPr id="10" name="TextBox 9"/>
-          <p:cNvSpPr txBox="1"/>
-          <p:nvPr/>
-        </p:nvSpPr>
-        <p:spPr>
-          <a:xfrm>
-            <a:off x="8275320" y="1828800"/>
-            <a:ext cx="2926080" cy="4206240"/>
-          </a:xfrm>
-          <a:prstGeom prst="rect">
-            <a:avLst/>
-          </a:prstGeom>
-          <a:noFill/>
-        </p:spPr>
-        <p:txBody>
-          <a:bodyPr wrap="square">
-            <a:spAutoFit/>
-          </a:bodyPr>
-          <a:lstStyle/>
-          <a:p>
-            <a:pPr>
-              <a:spcAft>
-                <a:spcPts val="1200"/>
-              </a:spcAft>
-              <a:defRPr sz="1800" b="1">
-                <a:solidFill>
-                  <a:srgbClr val="00D4FF"/>
-                </a:solidFill>
-              </a:defRPr>
-            </a:pPr>
-            <a:r>
-              <a:t>📁 FTP Decoy (:2121)</a:t>
+              <a:t>• Sustained Brute Force / Exploit Burst: +30 pts</a:t>
+            </a:r>
+            <a:br/>
+            <a:r>
+              <a:t>  [Critical Risk (active automated dictionary attack)]</a:t>
             </a:r>
           </a:p>
           <a:p>
@@ -7397,59 +5605,18 @@
               <a:spcAft>
                 <a:spcPts val="800"/>
               </a:spcAft>
-              <a:defRPr sz="1300">
+              <a:defRPr sz="1200">
                 <a:solidFill>
                   <a:srgbClr val="F0F6FC"/>
                 </a:solidFill>
               </a:defRPr>
             </a:pPr>
             <a:r>
-              <a:t>• Built on pure-Python `pyftpdlib`.</a:t>
-            </a:r>
-          </a:p>
-          <a:p>
-            <a:pPr>
-              <a:spcAft>
-                <a:spcPts val="800"/>
-              </a:spcAft>
-              <a:defRPr sz="1300">
-                <a:solidFill>
-                  <a:srgbClr val="F0F6FC"/>
-                </a:solidFill>
-              </a:defRPr>
-            </a:pPr>
-            <a:r>
-              <a:t>• Allows anonymous or dictionary logins.</a:t>
-            </a:r>
-          </a:p>
-          <a:p>
-            <a:pPr>
-              <a:spcAft>
-                <a:spcPts val="800"/>
-              </a:spcAft>
-              <a:defRPr sz="1300">
-                <a:solidFill>
-                  <a:srgbClr val="F0F6FC"/>
-                </a:solidFill>
-              </a:defRPr>
-            </a:pPr>
-            <a:r>
-              <a:t>• Honeytoken File Serving: Houses `credentials.xlsx` and `backup_database.sql`.</a:t>
-            </a:r>
-          </a:p>
-          <a:p>
-            <a:pPr>
-              <a:spcAft>
-                <a:spcPts val="800"/>
-              </a:spcAft>
-              <a:defRPr sz="1300">
-                <a:solidFill>
-                  <a:srgbClr val="F0F6FC"/>
-                </a:solidFill>
-              </a:defRPr>
-            </a:pPr>
-            <a:r>
-              <a:t>• Overridden `on_file_sent` triggers instant +15 pts download alert.</a:t>
+              <a:t>• Honeytoken File Access (.env / .sql): +40 pts</a:t>
+            </a:r>
+            <a:br/>
+            <a:r>
+              <a:t>  [Severe Risk (guaranteed internal breach tripwire)]</a:t>
             </a:r>
           </a:p>
         </p:txBody>
@@ -7487,7 +5654,7 @@
             <a:avLst/>
           </a:prstGeom>
           <a:solidFill>
-            <a:srgbClr val="0D1117"/>
+            <a:srgbClr val="090D16"/>
           </a:solidFill>
           <a:ln>
             <a:noFill/>
@@ -7545,7 +5712,7 @@
               </a:defRPr>
             </a:pPr>
             <a:r>
-              <a:t>05 / SCORING ENGINE</a:t>
+              <a:t>AUTONOMOUS RESPONSE   |   SLIDE 6 OF 8</a:t>
             </a:r>
           </a:p>
         </p:txBody>
@@ -7580,7 +5747,7 @@
               </a:defRPr>
             </a:pPr>
             <a:r>
-              <a:t>Behavioral Scoring Engine &amp; Mathematical Model</a:t>
+              <a:t>Zero-Delay Auto-Quarantine &amp; Mobile Telegram Alerts</a:t>
             </a:r>
           </a:p>
         </p:txBody>
@@ -7594,17 +5761,17 @@
         <p:spPr>
           <a:xfrm>
             <a:off x="731520" y="1645920"/>
-            <a:ext cx="5120640" cy="4572000"/>
+            <a:ext cx="5175504" cy="4572000"/>
           </a:xfrm>
           <a:prstGeom prst="roundRect">
             <a:avLst/>
           </a:prstGeom>
           <a:solidFill>
-            <a:srgbClr val="161B22"/>
+            <a:srgbClr val="121826"/>
           </a:solidFill>
           <a:ln w="19050">
             <a:solidFill>
-              <a:srgbClr val="00D4FF"/>
+              <a:srgbClr val="FF3366"/>
             </a:solidFill>
           </a:ln>
         </p:spPr>
@@ -7638,8 +5805,8 @@
         </p:nvSpPr>
         <p:spPr>
           <a:xfrm>
-            <a:off x="960120" y="1828800"/>
-            <a:ext cx="4663440" cy="4206240"/>
+            <a:off x="914400" y="1783080"/>
+            <a:ext cx="4809744" cy="4297680"/>
           </a:xfrm>
           <a:prstGeom prst="rect">
             <a:avLst/>
@@ -7654,136 +5821,104 @@
           <a:p>
             <a:pPr>
               <a:spcAft>
-                <a:spcPts val="1200"/>
+                <a:spcPts val="1000"/>
               </a:spcAft>
-              <a:defRPr sz="1800" b="1">
-                <a:solidFill>
-                  <a:srgbClr val="00D4FF"/>
-                </a:solidFill>
-              </a:defRPr>
-            </a:pPr>
-            <a:r>
-              <a:t>Scoring Formula &amp; Event Weights</a:t>
+              <a:defRPr sz="1500" b="1">
+                <a:solidFill>
+                  <a:srgbClr val="FF3366"/>
+                </a:solidFill>
+              </a:defRPr>
+            </a:pPr>
+            <a:r>
+              <a:t>🛡️ 25-Point Auto-Quarantine Threshold</a:t>
             </a:r>
           </a:p>
           <a:p>
             <a:pPr>
               <a:spcAft>
-                <a:spcPts val="800"/>
+                <a:spcPts val="600"/>
               </a:spcAft>
-              <a:defRPr sz="1300">
+              <a:defRPr sz="1200">
                 <a:solidFill>
                   <a:srgbClr val="F0F6FC"/>
                 </a:solidFill>
               </a:defRPr>
             </a:pPr>
             <a:r>
-              <a:t>📐 Formula: S(A) = min(100, Σ W(Ei) + M_lateral)</a:t>
+              <a:t>• Why 25 Points?</a:t>
+            </a:r>
+            <a:br/>
+            <a:r>
+              <a:t>  Calibrated to prevent false-positive blocks from single casual port pings (5 pts), while instantly neutralizing deliberate multi-step attacks.</a:t>
             </a:r>
           </a:p>
           <a:p>
             <a:pPr>
               <a:spcAft>
-                <a:spcPts val="800"/>
+                <a:spcPts val="600"/>
               </a:spcAft>
-              <a:defRPr sz="1300">
+              <a:defRPr sz="1200">
                 <a:solidFill>
                   <a:srgbClr val="F0F6FC"/>
                 </a:solidFill>
               </a:defRPr>
             </a:pPr>
             <a:r>
-              <a:t>━━━━━━━━━━━━━━━━━━━━━━━━━━━━━━━━━━━━━━━━</a:t>
+              <a:t>• Trigger Combinations:</a:t>
+            </a:r>
+            <a:br/>
+            <a:r>
+              <a:t>  • 2 Directory Traversals: 15 + 15 = 30 pts ≥ 25 ➔ QUARANTINE</a:t>
+            </a:r>
+            <a:br/>
+            <a:r>
+              <a:t>• 1 SQL Injection + 1 Probe: 20 + 5 = 25 pts ≥ 25 ➔ QUARANTINE</a:t>
+            </a:r>
+            <a:br/>
+            <a:r>
+              <a:t>• 1 Brute-Force Burst: 30 pts ≥ 25 ➔ IMMEDIATE QUARANTINE</a:t>
             </a:r>
           </a:p>
           <a:p>
             <a:pPr>
               <a:spcAft>
-                <a:spcPts val="800"/>
+                <a:spcPts val="600"/>
               </a:spcAft>
-              <a:defRPr sz="1300">
+              <a:defRPr sz="1200">
                 <a:solidFill>
                   <a:srgbClr val="F0F6FC"/>
                 </a:solidFill>
               </a:defRPr>
             </a:pPr>
             <a:r>
-              <a:t>• Initial Interaction: +5 pts (Port scan, recon)</a:t>
+              <a:t>• Sub-50ms Reaction Speed:</a:t>
+            </a:r>
+            <a:br/>
+            <a:r>
+              <a:t>  Executes in &lt; 50ms compared to the 15–45 minute average response time of traditional human SOC teams.</a:t>
             </a:r>
           </a:p>
           <a:p>
             <a:pPr>
               <a:spcAft>
-                <a:spcPts val="800"/>
+                <a:spcPts val="600"/>
               </a:spcAft>
-              <a:defRPr sz="1300">
+              <a:defRPr sz="1200">
                 <a:solidFill>
                   <a:srgbClr val="F0F6FC"/>
                 </a:solidFill>
               </a:defRPr>
             </a:pPr>
             <a:r>
-              <a:t>• Credential Brute-Force: +8 pts per attempt</a:t>
-            </a:r>
-          </a:p>
-          <a:p>
-            <a:pPr>
-              <a:spcAft>
-                <a:spcPts val="800"/>
-              </a:spcAft>
-              <a:defRPr sz="1300">
-                <a:solidFill>
-                  <a:srgbClr val="F0F6FC"/>
-                </a:solidFill>
-              </a:defRPr>
-            </a:pPr>
-            <a:r>
-              <a:t>• Interactive Shell Access: +15 pts (High breach risk)</a:t>
-            </a:r>
-          </a:p>
-          <a:p>
-            <a:pPr>
-              <a:spcAft>
-                <a:spcPts val="800"/>
-              </a:spcAft>
-              <a:defRPr sz="1300">
-                <a:solidFill>
-                  <a:srgbClr val="F0F6FC"/>
-                </a:solidFill>
-              </a:defRPr>
-            </a:pPr>
-            <a:r>
-              <a:t>• Sensitive Command: +5 pts (whoami, id, cat /etc/passwd)</a:t>
-            </a:r>
-          </a:p>
-          <a:p>
-            <a:pPr>
-              <a:spcAft>
-                <a:spcPts val="800"/>
-              </a:spcAft>
-              <a:defRPr sz="1300">
-                <a:solidFill>
-                  <a:srgbClr val="F0F6FC"/>
-                </a:solidFill>
-              </a:defRPr>
-            </a:pPr>
-            <a:r>
-              <a:t>• Lateral Cross-Service Probe: +15 pts (Hitting 2+ trap ports)</a:t>
-            </a:r>
-          </a:p>
-          <a:p>
-            <a:pPr>
-              <a:spcAft>
-                <a:spcPts val="800"/>
-              </a:spcAft>
-              <a:defRPr sz="1300">
-                <a:solidFill>
-                  <a:srgbClr val="F0F6FC"/>
-                </a:solidFill>
-              </a:defRPr>
-            </a:pPr>
-            <a:r>
-              <a:t>• Honeytoken Tripwire Touch: +25 pts (Immediate critical violation)</a:t>
+              <a:t>• Cross-Platform OS Enforcement:</a:t>
+            </a:r>
+            <a:br/>
+            <a:r>
+              <a:t>  • Linux: iptables -I INPUT -s &lt;ip&gt; -j DROP</a:t>
+            </a:r>
+            <a:br/>
+            <a:r>
+              <a:t>• Windows: netsh advfirewall firewall add rule name="MIRAGE-BLOCK" dir=in action=block remoteip=&lt;ip&gt;</a:t>
             </a:r>
           </a:p>
         </p:txBody>
@@ -7796,18 +5931,18 @@
         </p:nvSpPr>
         <p:spPr>
           <a:xfrm>
-            <a:off x="6217920" y="1645920"/>
-            <a:ext cx="5212080" cy="4572000"/>
+            <a:off x="6272784" y="1645920"/>
+            <a:ext cx="5175504" cy="4572000"/>
           </a:xfrm>
           <a:prstGeom prst="roundRect">
             <a:avLst/>
           </a:prstGeom>
           <a:solidFill>
-            <a:srgbClr val="161B22"/>
+            <a:srgbClr val="121826"/>
           </a:solidFill>
-          <a:ln w="19050">
+          <a:ln w="12700">
             <a:solidFill>
-              <a:srgbClr val="FF8C00"/>
+              <a:srgbClr val="1E293B"/>
             </a:solidFill>
           </a:ln>
         </p:spPr>
@@ -7841,8 +5976,8 @@
         </p:nvSpPr>
         <p:spPr>
           <a:xfrm>
-            <a:off x="6446520" y="1828800"/>
-            <a:ext cx="4754880" cy="4206240"/>
+            <a:off x="6455664" y="1783080"/>
+            <a:ext cx="4809744" cy="4297680"/>
           </a:xfrm>
           <a:prstGeom prst="rect">
             <a:avLst/>
@@ -7857,136 +5992,108 @@
           <a:p>
             <a:pPr>
               <a:spcAft>
-                <a:spcPts val="1200"/>
+                <a:spcPts val="1000"/>
               </a:spcAft>
-              <a:defRPr sz="1800" b="1">
-                <a:solidFill>
-                  <a:srgbClr val="FF8C00"/>
-                </a:solidFill>
-              </a:defRPr>
-            </a:pPr>
-            <a:r>
-              <a:t>Threat Classification Tiers</a:t>
+              <a:defRPr sz="1500" b="1">
+                <a:solidFill>
+                  <a:srgbClr val="00FF88"/>
+                </a:solidFill>
+              </a:defRPr>
+            </a:pPr>
+            <a:r>
+              <a:t>📱 Instant Telegram SOC Push Notifications</a:t>
             </a:r>
           </a:p>
           <a:p>
             <a:pPr>
               <a:spcAft>
-                <a:spcPts val="800"/>
+                <a:spcPts val="600"/>
               </a:spcAft>
-              <a:defRPr sz="1300">
-                <a:solidFill>
-                  <a:srgbClr val="F0F6FC"/>
-                </a:solidFill>
-              </a:defRPr>
-            </a:pPr>
-            <a:r>
-              <a:t>🟢 Scanner (0–20 pts):</a:t>
+              <a:defRPr sz="1200">
+                <a:solidFill>
+                  <a:srgbClr val="94A3B8"/>
+                </a:solidFill>
+              </a:defRPr>
+            </a:pPr>
+            <a:r>
+              <a:t>• Mobile SOC Reach:</a:t>
+            </a:r>
+            <a:br/>
+            <a:r>
+              <a:t>  Admins are not stationed at a terminal 24/7. Push notifications deliver instant situational awareness to smartphones anywhere.</a:t>
             </a:r>
           </a:p>
           <a:p>
             <a:pPr>
               <a:spcAft>
-                <a:spcPts val="800"/>
+                <a:spcPts val="600"/>
               </a:spcAft>
-              <a:defRPr sz="1300">
-                <a:solidFill>
-                  <a:srgbClr val="F0F6FC"/>
-                </a:solidFill>
-              </a:defRPr>
-            </a:pPr>
-            <a:r>
-              <a:t>   Automated reconnaissance bots. Logged for trend analysis.</a:t>
+              <a:defRPr sz="1200">
+                <a:solidFill>
+                  <a:srgbClr val="94A3B8"/>
+                </a:solidFill>
+              </a:defRPr>
+            </a:pPr>
+            <a:r>
+              <a:t>• Asynchronous &amp; Non-Blocking:</a:t>
+            </a:r>
+            <a:br/>
+            <a:r>
+              <a:t>  Dispatched via background worker queue; network latency or bot delays never degrade decoy capture responsiveness.</a:t>
             </a:r>
           </a:p>
           <a:p>
             <a:pPr>
               <a:spcAft>
-                <a:spcPts val="800"/>
+                <a:spcPts val="600"/>
               </a:spcAft>
-              <a:defRPr sz="1300">
-                <a:solidFill>
-                  <a:srgbClr val="F0F6FC"/>
-                </a:solidFill>
-              </a:defRPr>
-            </a:pPr>
-            <a:r>
-              <a:t>🟡 Suspicious (21–50 pts):</a:t>
+              <a:defRPr sz="1200">
+                <a:solidFill>
+                  <a:srgbClr val="94A3B8"/>
+                </a:solidFill>
+              </a:defRPr>
+            </a:pPr>
+            <a:r>
+              <a:t>• Rich Incident Payload Contents:</a:t>
+            </a:r>
+            <a:br/>
+            <a:r>
+              <a:t>  • 🚨 Severity Banner: CRITICAL / QUARANTINE</a:t>
+            </a:r>
+            <a:br/>
+            <a:r>
+              <a:t>• 🌐 Attacker IP &amp; GeoIP Origin Country</a:t>
+            </a:r>
+            <a:br/>
+            <a:r>
+              <a:t>• 🎯 Targeted Service &amp; Exploit String</a:t>
+            </a:r>
+            <a:br/>
+            <a:r>
+              <a:t>• 📈 Real-Time Threat Score vs 25 Threshold</a:t>
+            </a:r>
+            <a:br/>
+            <a:r>
+              <a:t>• 🛡️ Confirmation of Applied Firewall DROP Rule</a:t>
             </a:r>
           </a:p>
           <a:p>
             <a:pPr>
               <a:spcAft>
-                <a:spcPts val="800"/>
+                <a:spcPts val="600"/>
               </a:spcAft>
-              <a:defRPr sz="1300">
-                <a:solidFill>
-                  <a:srgbClr val="F0F6FC"/>
-                </a:solidFill>
-              </a:defRPr>
-            </a:pPr>
-            <a:r>
-              <a:t>   Repeated unauthorized probes. Telegram warning dispatched.</a:t>
-            </a:r>
-          </a:p>
-          <a:p>
-            <a:pPr>
-              <a:spcAft>
-                <a:spcPts val="800"/>
-              </a:spcAft>
-              <a:defRPr sz="1300">
-                <a:solidFill>
-                  <a:srgbClr val="F0F6FC"/>
-                </a:solidFill>
-              </a:defRPr>
-            </a:pPr>
-            <a:r>
-              <a:t>🟠 Active Threat (51–75 pts):</a:t>
-            </a:r>
-          </a:p>
-          <a:p>
-            <a:pPr>
-              <a:spcAft>
-                <a:spcPts val="800"/>
-              </a:spcAft>
-              <a:defRPr sz="1300">
-                <a:solidFill>
-                  <a:srgbClr val="F0F6FC"/>
-                </a:solidFill>
-              </a:defRPr>
-            </a:pPr>
-            <a:r>
-              <a:t>   Multi-vector breach attempt. Escalated priority alert.</a:t>
-            </a:r>
-          </a:p>
-          <a:p>
-            <a:pPr>
-              <a:spcAft>
-                <a:spcPts val="800"/>
-              </a:spcAft>
-              <a:defRPr sz="1300">
-                <a:solidFill>
-                  <a:srgbClr val="F0F6FC"/>
-                </a:solidFill>
-              </a:defRPr>
-            </a:pPr>
-            <a:r>
-              <a:t>🔴 Critical Threat (76–100 pts):</a:t>
-            </a:r>
-          </a:p>
-          <a:p>
-            <a:pPr>
-              <a:spcAft>
-                <a:spcPts val="800"/>
-              </a:spcAft>
-              <a:defRPr sz="1300">
-                <a:solidFill>
-                  <a:srgbClr val="F0F6FC"/>
-                </a:solidFill>
-              </a:defRPr>
-            </a:pPr>
-            <a:r>
-              <a:t>   Targeted malicious actor. Auto-Quarantined at firewall level.</a:t>
+              <a:defRPr sz="1200">
+                <a:solidFill>
+                  <a:srgbClr val="94A3B8"/>
+                </a:solidFill>
+              </a:defRPr>
+            </a:pPr>
+            <a:r>
+              <a:t>• Zero-Secrets Git Security:</a:t>
+            </a:r>
+            <a:br/>
+            <a:r>
+              <a:t>  Bot tokens &amp; Chat IDs stored strictly in local .env files; never committed to public version control.</a:t>
             </a:r>
           </a:p>
         </p:txBody>
@@ -8024,7 +6131,7 @@
             <a:avLst/>
           </a:prstGeom>
           <a:solidFill>
-            <a:srgbClr val="0D1117"/>
+            <a:srgbClr val="090D16"/>
           </a:solidFill>
           <a:ln>
             <a:noFill/>
@@ -8082,7 +6189,7 @@
               </a:defRPr>
             </a:pPr>
             <a:r>
-              <a:t>06 / ACTIVE RESPONSE</a:t>
+              <a:t>OPERATIONS &amp; DEPLOYMENT   |   SLIDE 7 OF 8</a:t>
             </a:r>
           </a:p>
         </p:txBody>
@@ -8117,7 +6224,7 @@
               </a:defRPr>
             </a:pPr>
             <a:r>
-              <a:t>Automated Quarantine &amp; Subnet Whitelisting</a:t>
+              <a:t>SOC Command Dashboard &amp; Production Deployment</a:t>
             </a:r>
           </a:p>
         </p:txBody>
@@ -8131,17 +6238,17 @@
         <p:spPr>
           <a:xfrm>
             <a:off x="731520" y="1645920"/>
-            <a:ext cx="5120640" cy="4572000"/>
+            <a:ext cx="5175504" cy="4572000"/>
           </a:xfrm>
           <a:prstGeom prst="roundRect">
             <a:avLst/>
           </a:prstGeom>
           <a:solidFill>
-            <a:srgbClr val="161B22"/>
+            <a:srgbClr val="121826"/>
           </a:solidFill>
-          <a:ln w="19050">
+          <a:ln w="12700">
             <a:solidFill>
-              <a:srgbClr val="FF4444"/>
+              <a:srgbClr val="1E293B"/>
             </a:solidFill>
           </a:ln>
         </p:spPr>
@@ -8175,8 +6282,8 @@
         </p:nvSpPr>
         <p:spPr>
           <a:xfrm>
-            <a:off x="960120" y="1828800"/>
-            <a:ext cx="4663440" cy="4206240"/>
+            <a:off x="914400" y="1783080"/>
+            <a:ext cx="4809744" cy="4297680"/>
           </a:xfrm>
           <a:prstGeom prst="rect">
             <a:avLst/>
@@ -8191,121 +6298,106 @@
           <a:p>
             <a:pPr>
               <a:spcAft>
-                <a:spcPts val="1200"/>
+                <a:spcPts val="1000"/>
               </a:spcAft>
-              <a:defRPr sz="1800" b="1">
-                <a:solidFill>
-                  <a:srgbClr val="FF4444"/>
-                </a:solidFill>
-              </a:defRPr>
-            </a:pPr>
-            <a:r>
-              <a:t>Firewall Enforcement (25 Pts Trigger)</a:t>
+              <a:defRPr sz="1500" b="1">
+                <a:solidFill>
+                  <a:srgbClr val="00D4FF"/>
+                </a:solidFill>
+              </a:defRPr>
+            </a:pPr>
+            <a:r>
+              <a:t>🖥️ 6 Core Command Center Views</a:t>
             </a:r>
           </a:p>
           <a:p>
             <a:pPr>
               <a:spcAft>
-                <a:spcPts val="800"/>
+                <a:spcPts val="500"/>
               </a:spcAft>
-              <a:defRPr sz="1300">
+              <a:defRPr sz="1150">
                 <a:solidFill>
                   <a:srgbClr val="F0F6FC"/>
                 </a:solidFill>
               </a:defRPr>
             </a:pPr>
             <a:r>
-              <a:t>⚡ Immediate Isolation: The moment attacker score reaches &gt;= 25 points, firewall blocking executes automatically.</a:t>
+              <a:t>• Overview Command Hub (/): Executive KPIs, Threat Severity Doughnut &amp; Top Attacking Countries Bar Charts.</a:t>
             </a:r>
           </a:p>
           <a:p>
             <a:pPr>
               <a:spcAft>
-                <a:spcPts val="800"/>
+                <a:spcPts val="500"/>
               </a:spcAft>
-              <a:defRPr sz="1300">
+              <a:defRPr sz="1150">
                 <a:solidFill>
                   <a:srgbClr val="F0F6FC"/>
                 </a:solidFill>
               </a:defRPr>
             </a:pPr>
             <a:r>
-              <a:t>💻 Windows Firewall Integration:</a:t>
+              <a:t>• Full Attack Telemetry (/attacks): Clean 10-records-per-page pagination with protocol filter chips and 1-click CSV audit export.</a:t>
             </a:r>
           </a:p>
           <a:p>
             <a:pPr>
               <a:spcAft>
-                <a:spcPts val="800"/>
+                <a:spcPts val="500"/>
               </a:spcAft>
-              <a:defRPr sz="1300">
+              <a:defRPr sz="1150">
                 <a:solidFill>
                   <a:srgbClr val="F0F6FC"/>
                 </a:solidFill>
               </a:defRPr>
             </a:pPr>
             <a:r>
-              <a:t>   netsh advfirewall firewall add rule name="MIRAGE_BLOCK_{IP}" dir=in action=block remoteip={IP}</a:t>
+              <a:t>• Attacker Profile &amp; Timeline (/attacker/&lt;ip&gt;): Chronological narrative replay detailing the adversary's step-by-step kill-chain.</a:t>
             </a:r>
           </a:p>
           <a:p>
             <a:pPr>
               <a:spcAft>
-                <a:spcPts val="800"/>
+                <a:spcPts val="500"/>
               </a:spcAft>
-              <a:defRPr sz="1300">
+              <a:defRPr sz="1150">
                 <a:solidFill>
                   <a:srgbClr val="F0F6FC"/>
                 </a:solidFill>
               </a:defRPr>
             </a:pPr>
             <a:r>
-              <a:t>🐧 Linux iptables Integration:</a:t>
+              <a:t>• Quarantine Hub (/quarantine): Active isolation management table with instant 1-click manual unblock overrides.</a:t>
             </a:r>
           </a:p>
           <a:p>
             <a:pPr>
               <a:spcAft>
-                <a:spcPts val="800"/>
+                <a:spcPts val="500"/>
               </a:spcAft>
-              <a:defRPr sz="1300">
+              <a:defRPr sz="1150">
                 <a:solidFill>
                   <a:srgbClr val="F0F6FC"/>
                 </a:solidFill>
               </a:defRPr>
             </a:pPr>
             <a:r>
-              <a:t>   iptables -A INPUT -s {IP} -j DROP</a:t>
+              <a:t>• Honeytoken Tripwires (/honeytokens): High-enticement decoy files (.env, credentials.xlsx, backup.sql) with watchdog filesystem traps.</a:t>
             </a:r>
           </a:p>
           <a:p>
             <a:pPr>
               <a:spcAft>
-                <a:spcPts val="800"/>
+                <a:spcPts val="500"/>
               </a:spcAft>
-              <a:defRPr sz="1300">
+              <a:defRPr sz="1150">
                 <a:solidFill>
                   <a:srgbClr val="F0F6FC"/>
                 </a:solidFill>
               </a:defRPr>
             </a:pPr>
             <a:r>
-              <a:t>⏳ Auto-Expiration: Quarantines expire after 1 hour (3600s) to keep tables clean.</a:t>
-            </a:r>
-          </a:p>
-          <a:p>
-            <a:pPr>
-              <a:spcAft>
-                <a:spcPts val="800"/>
-              </a:spcAft>
-              <a:defRPr sz="1300">
-                <a:solidFill>
-                  <a:srgbClr val="F0F6FC"/>
-                </a:solidFill>
-              </a:defRPr>
-            </a:pPr>
-            <a:r>
-              <a:t>🛡️ Graceful Degradation: Persists audit log even in non-elevated user shells.</a:t>
+              <a:t>• System Control Panel (/settings): Dynamic threshold adjustment (25 pts), Telegram bot toggle, and decoy port configurations.</a:t>
             </a:r>
           </a:p>
         </p:txBody>
@@ -8318,18 +6410,18 @@
         </p:nvSpPr>
         <p:spPr>
           <a:xfrm>
-            <a:off x="6217920" y="1645920"/>
-            <a:ext cx="5212080" cy="4572000"/>
+            <a:off x="6272784" y="1645920"/>
+            <a:ext cx="5175504" cy="4572000"/>
           </a:xfrm>
           <a:prstGeom prst="roundRect">
             <a:avLst/>
           </a:prstGeom>
           <a:solidFill>
-            <a:srgbClr val="161B22"/>
+            <a:srgbClr val="121826"/>
           </a:solidFill>
-          <a:ln w="19050">
+          <a:ln w="12700">
             <a:solidFill>
-              <a:srgbClr val="00FF41"/>
+              <a:srgbClr val="1E293B"/>
             </a:solidFill>
           </a:ln>
         </p:spPr>
@@ -8363,8 +6455,8 @@
         </p:nvSpPr>
         <p:spPr>
           <a:xfrm>
-            <a:off x="6446520" y="1828800"/>
-            <a:ext cx="4754880" cy="4206240"/>
+            <a:off x="6455664" y="1783080"/>
+            <a:ext cx="4809744" cy="4297680"/>
           </a:xfrm>
           <a:prstGeom prst="rect">
             <a:avLst/>
@@ -8379,16 +6471,16 @@
           <a:p>
             <a:pPr>
               <a:spcAft>
-                <a:spcPts val="1200"/>
+                <a:spcPts val="1000"/>
               </a:spcAft>
-              <a:defRPr sz="1800" b="1">
-                <a:solidFill>
-                  <a:srgbClr val="00FF41"/>
-                </a:solidFill>
-              </a:defRPr>
-            </a:pPr>
-            <a:r>
-              <a:t>CIDR Whitelisting &amp; Self-Lockout Prevention</a:t>
+              <a:defRPr sz="1500" b="1">
+                <a:solidFill>
+                  <a:srgbClr val="A855F7"/>
+                </a:solidFill>
+              </a:defRPr>
+            </a:pPr>
+            <a:r>
+              <a:t>🌐 Production Deployment &amp; Git Sync</a:t>
             </a:r>
           </a:p>
           <a:p>
@@ -8396,14 +6488,18 @@
               <a:spcAft>
                 <a:spcPts val="800"/>
               </a:spcAft>
-              <a:defRPr sz="1300">
-                <a:solidFill>
-                  <a:srgbClr val="F0F6FC"/>
-                </a:solidFill>
-              </a:defRPr>
-            </a:pPr>
-            <a:r>
-              <a:t>🛡️ The Problem: Admins vulnerability-testing the honeypot could accidentally block themselves.</a:t>
+              <a:defRPr sz="1200">
+                <a:solidFill>
+                  <a:srgbClr val="94A3B8"/>
+                </a:solidFill>
+              </a:defRPr>
+            </a:pPr>
+            <a:r>
+              <a:t>• Vercel Edge Global Deployment:</a:t>
+            </a:r>
+            <a:br/>
+            <a:r>
+              <a:t>  Live frontend deployed globally at mirage-junior.vercel.app with zero cold-start latency.</a:t>
             </a:r>
           </a:p>
           <a:p>
@@ -8411,14 +6507,18 @@
               <a:spcAft>
                 <a:spcPts val="800"/>
               </a:spcAft>
-              <a:defRPr sz="1300">
-                <a:solidFill>
-                  <a:srgbClr val="F0F6FC"/>
-                </a:solidFill>
-              </a:defRPr>
-            </a:pPr>
-            <a:r>
-              <a:t>✅ The Solution: IP Whitelist with CIDR subnet matching (`config/whitelist.json`).</a:t>
+              <a:defRPr sz="1200">
+                <a:solidFill>
+                  <a:srgbClr val="94A3B8"/>
+                </a:solidFill>
+              </a:defRPr>
+            </a:pPr>
+            <a:r>
+              <a:t>• Zero-Dependency SQLite Backend:</a:t>
+            </a:r>
+            <a:br/>
+            <a:r>
+              <a:t>  Embedded ACID storage using WAL (Write-Ahead Logging) mode, preventing database lockups during heavy port scans.</a:t>
             </a:r>
           </a:p>
           <a:p>
@@ -8426,14 +6526,22 @@
               <a:spcAft>
                 <a:spcPts val="800"/>
               </a:spcAft>
-              <a:defRPr sz="1300">
-                <a:solidFill>
-                  <a:srgbClr val="F0F6FC"/>
-                </a:solidFill>
-              </a:defRPr>
-            </a:pPr>
-            <a:r>
-              <a:t>🌐 Subnet Parsing via Python's native `ipaddress` module:</a:t>
+              <a:defRPr sz="1200">
+                <a:solidFill>
+                  <a:srgbClr val="94A3B8"/>
+                </a:solidFill>
+              </a:defRPr>
+            </a:pPr>
+            <a:r>
+              <a:t>• Dual Synchronized Repositories:</a:t>
+            </a:r>
+            <a:br/>
+            <a:r>
+              <a:t>  • Lead Repo: github.com/Jaskaranbandral-07/mirage-junior</a:t>
+            </a:r>
+            <a:br/>
+            <a:r>
+              <a:t>• Contributor Repo: github.com/2024A7R009/mirage-junior</a:t>
             </a:r>
           </a:p>
           <a:p>
@@ -8441,59 +6549,18 @@
               <a:spcAft>
                 <a:spcPts val="800"/>
               </a:spcAft>
-              <a:defRPr sz="1300">
-                <a:solidFill>
-                  <a:srgbClr val="F0F6FC"/>
-                </a:solidFill>
-              </a:defRPr>
-            </a:pPr>
-            <a:r>
-              <a:t>   • 127.0.0.1 and localhost (Host loopback)</a:t>
-            </a:r>
-          </a:p>
-          <a:p>
-            <a:pPr>
-              <a:spcAft>
-                <a:spcPts val="800"/>
-              </a:spcAft>
-              <a:defRPr sz="1300">
-                <a:solidFill>
-                  <a:srgbClr val="F0F6FC"/>
-                </a:solidFill>
-              </a:defRPr>
-            </a:pPr>
-            <a:r>
-              <a:t>   • 192.168.0.0/16 (Private LAN / Wi-Fi)</a:t>
-            </a:r>
-          </a:p>
-          <a:p>
-            <a:pPr>
-              <a:spcAft>
-                <a:spcPts val="800"/>
-              </a:spcAft>
-              <a:defRPr sz="1300">
-                <a:solidFill>
-                  <a:srgbClr val="F0F6FC"/>
-                </a:solidFill>
-              </a:defRPr>
-            </a:pPr>
-            <a:r>
-              <a:t>   • 10.0.0.0/8 (Corporate intranet)</a:t>
-            </a:r>
-          </a:p>
-          <a:p>
-            <a:pPr>
-              <a:spcAft>
-                <a:spcPts val="800"/>
-              </a:spcAft>
-              <a:defRPr sz="1300">
-                <a:solidFill>
-                  <a:srgbClr val="F0F6FC"/>
-                </a:solidFill>
-              </a:defRPr>
-            </a:pPr>
-            <a:r>
-              <a:t>🔓 Admin Override: One-click interactive 'Unblock' action on dashboard.</a:t>
+              <a:defRPr sz="1200">
+                <a:solidFill>
+                  <a:srgbClr val="94A3B8"/>
+                </a:solidFill>
+              </a:defRPr>
+            </a:pPr>
+            <a:r>
+              <a:t>• Robust Dual-Channel Streaming:</a:t>
+            </a:r>
+            <a:br/>
+            <a:r>
+              <a:t>  Sub-second WebSockets with automatic fallback to 5-second asynchronous polling for resilient connectivity.</a:t>
             </a:r>
           </a:p>
         </p:txBody>
@@ -8531,7 +6598,7 @@
             <a:avLst/>
           </a:prstGeom>
           <a:solidFill>
-            <a:srgbClr val="0D1117"/>
+            <a:srgbClr val="090D16"/>
           </a:solidFill>
           <a:ln>
             <a:noFill/>
@@ -8567,8 +6634,8 @@
         </p:nvSpPr>
         <p:spPr>
           <a:xfrm>
-            <a:off x="731520" y="365760"/>
-            <a:ext cx="10698480" cy="365760"/>
+            <a:off x="731520" y="1097280"/>
+            <a:ext cx="10728655" cy="4754880"/>
           </a:xfrm>
           <a:prstGeom prst="rect">
             <a:avLst/>
@@ -8581,790 +6648,88 @@
           </a:bodyPr>
           <a:lstStyle/>
           <a:p>
-            <a:pPr>
-              <a:defRPr sz="1100" b="1">
+            <a:pPr algn="ctr">
+              <a:spcAft>
+                <a:spcPts val="1600"/>
+              </a:spcAft>
+              <a:defRPr sz="1300" b="1">
                 <a:solidFill>
                   <a:srgbClr val="00D4FF"/>
                 </a:solidFill>
               </a:defRPr>
             </a:pPr>
             <a:r>
-              <a:t>07 / DECEPTION BAIT</a:t>
-            </a:r>
-          </a:p>
-        </p:txBody>
-      </p:sp>
-      <p:sp>
-        <p:nvSpPr>
-          <p:cNvPr id="4" name="TextBox 3"/>
-          <p:cNvSpPr txBox="1"/>
-          <p:nvPr/>
-        </p:nvSpPr>
-        <p:spPr>
-          <a:xfrm>
-            <a:off x="731520" y="685800"/>
-            <a:ext cx="10698480" cy="731520"/>
-          </a:xfrm>
-          <a:prstGeom prst="rect">
-            <a:avLst/>
-          </a:prstGeom>
-          <a:noFill/>
-        </p:spPr>
-        <p:txBody>
-          <a:bodyPr wrap="square">
-            <a:spAutoFit/>
-          </a:bodyPr>
-          <a:lstStyle/>
-          <a:p>
-            <a:pPr>
-              <a:defRPr sz="2600" b="1">
+              <a:t>CAPSTONE DEFENSE CONCLUDED   •   SLIDE 8 OF 8</a:t>
+            </a:r>
+          </a:p>
+          <a:p>
+            <a:pPr algn="ctr">
+              <a:spcAft>
+                <a:spcPts val="1400"/>
+              </a:spcAft>
+              <a:defRPr sz="5000" b="1">
                 <a:solidFill>
                   <a:srgbClr val="F0F6FC"/>
                 </a:solidFill>
               </a:defRPr>
             </a:pPr>
             <a:r>
-              <a:t>Honeytoken Tripwire System: Zero False Positives</a:t>
-            </a:r>
-          </a:p>
-        </p:txBody>
-      </p:sp>
-      <p:sp>
-        <p:nvSpPr>
-          <p:cNvPr id="5" name="Rounded Rectangle 4"/>
-          <p:cNvSpPr/>
-          <p:nvPr/>
-        </p:nvSpPr>
-        <p:spPr>
-          <a:xfrm>
-            <a:off x="731520" y="1645920"/>
-            <a:ext cx="5120640" cy="4572000"/>
-          </a:xfrm>
-          <a:prstGeom prst="roundRect">
-            <a:avLst/>
-          </a:prstGeom>
-          <a:solidFill>
-            <a:srgbClr val="161B22"/>
-          </a:solidFill>
-          <a:ln w="19050">
-            <a:solidFill>
-              <a:srgbClr val="00D4FF"/>
-            </a:solidFill>
-          </a:ln>
-        </p:spPr>
-        <p:style>
-          <a:lnRef idx="1">
-            <a:schemeClr val="accent1"/>
-          </a:lnRef>
-          <a:fillRef idx="3">
-            <a:schemeClr val="accent1"/>
-          </a:fillRef>
-          <a:effectRef idx="2">
-            <a:schemeClr val="accent1"/>
-          </a:effectRef>
-          <a:fontRef idx="minor">
-            <a:schemeClr val="lt1"/>
-          </a:fontRef>
-        </p:style>
-        <p:txBody>
-          <a:bodyPr rtlCol="0" anchor="ctr"/>
-          <a:lstStyle/>
-          <a:p>
-            <a:pPr algn="ctr"/>
-          </a:p>
-        </p:txBody>
-      </p:sp>
-      <p:sp>
-        <p:nvSpPr>
-          <p:cNvPr id="6" name="TextBox 5"/>
-          <p:cNvSpPr txBox="1"/>
-          <p:nvPr/>
-        </p:nvSpPr>
-        <p:spPr>
-          <a:xfrm>
-            <a:off x="960120" y="1828800"/>
-            <a:ext cx="4663440" cy="4206240"/>
-          </a:xfrm>
-          <a:prstGeom prst="rect">
-            <a:avLst/>
-          </a:prstGeom>
-          <a:noFill/>
-        </p:spPr>
-        <p:txBody>
-          <a:bodyPr wrap="square">
-            <a:spAutoFit/>
-          </a:bodyPr>
-          <a:lstStyle/>
-          <a:p>
-            <a:pPr>
+              <a:t>Thank You!</a:t>
+            </a:r>
+          </a:p>
+          <a:p>
+            <a:pPr algn="ctr">
               <a:spcAft>
-                <a:spcPts val="1200"/>
+                <a:spcPts val="2800"/>
               </a:spcAft>
-              <a:defRPr sz="1800" b="1">
+              <a:defRPr sz="1600">
+                <a:solidFill>
+                  <a:srgbClr val="94A3B8"/>
+                </a:solidFill>
+              </a:defRPr>
+            </a:pPr>
+            <a:r>
+              <a:t>MIRAGE Junior demonstrates that proactive deception, behavioral threat scoring, and zero-delay containment can fundamentally invert the cybersecurity asymmetry.</a:t>
+            </a:r>
+          </a:p>
+          <a:p>
+            <a:pPr algn="ctr">
+              <a:spcAft>
+                <a:spcPts val="2000"/>
+              </a:spcAft>
+              <a:defRPr sz="1600" b="1">
+                <a:solidFill>
+                  <a:srgbClr val="00FF88"/>
+                </a:solidFill>
+              </a:defRPr>
+            </a:pPr>
+            <a:r>
+              <a:t>🌐 Live Showcase: https://mirage-junior.vercel.app</a:t>
+            </a:r>
+            <a:br/>
+            <a:r>
+              <a:t>💻 GitHub: https://github.com/Jaskaranbandral-07/mirage-junior</a:t>
+            </a:r>
+          </a:p>
+          <a:p>
+            <a:pPr algn="ctr">
+              <a:defRPr sz="1400">
                 <a:solidFill>
                   <a:srgbClr val="00D4FF"/>
                 </a:solidFill>
               </a:defRPr>
             </a:pPr>
             <a:r>
-              <a:t>Planted Digital Baits</a:t>
-            </a:r>
-          </a:p>
-          <a:p>
-            <a:pPr>
-              <a:spcAft>
-                <a:spcPts val="800"/>
-              </a:spcAft>
-              <a:defRPr sz="1300">
-                <a:solidFill>
-                  <a:srgbClr val="F0F6FC"/>
-                </a:solidFill>
-              </a:defRPr>
-            </a:pPr>
-            <a:r>
-              <a:t>🪤 1. `/.env` Decoy Endpoint (HTTP):</a:t>
-            </a:r>
-          </a:p>
-          <a:p>
-            <a:pPr>
-              <a:spcAft>
-                <a:spcPts val="800"/>
-              </a:spcAft>
-              <a:defRPr sz="1300">
-                <a:solidFill>
-                  <a:srgbClr val="F0F6FC"/>
-                </a:solidFill>
-              </a:defRPr>
-            </a:pPr>
-            <a:r>
-              <a:t>   Returns fake production AWS keys, Stripe secrets, and database credentials.</a:t>
-            </a:r>
-          </a:p>
-          <a:p>
-            <a:pPr>
-              <a:spcAft>
-                <a:spcPts val="800"/>
-              </a:spcAft>
-              <a:defRPr sz="1300">
-                <a:solidFill>
-                  <a:srgbClr val="F0F6FC"/>
-                </a:solidFill>
-              </a:defRPr>
-            </a:pPr>
-            <a:r>
-              <a:t>🪤 2. `credentials.xlsx` (FTP Trap):</a:t>
-            </a:r>
-          </a:p>
-          <a:p>
-            <a:pPr>
-              <a:spcAft>
-                <a:spcPts val="800"/>
-              </a:spcAft>
-              <a:defRPr sz="1300">
-                <a:solidFill>
-                  <a:srgbClr val="F0F6FC"/>
-                </a:solidFill>
-              </a:defRPr>
-            </a:pPr>
-            <a:r>
-              <a:t>   Planted corporate password cheat-sheet enticing anonymous downloads.</a:t>
-            </a:r>
-          </a:p>
-          <a:p>
-            <a:pPr>
-              <a:spcAft>
-                <a:spcPts val="800"/>
-              </a:spcAft>
-              <a:defRPr sz="1300">
-                <a:solidFill>
-                  <a:srgbClr val="F0F6FC"/>
-                </a:solidFill>
-              </a:defRPr>
-            </a:pPr>
-            <a:r>
-              <a:t>🪤 3. `backup_database.sql` (Local Filesystem):</a:t>
-            </a:r>
-          </a:p>
-          <a:p>
-            <a:pPr>
-              <a:spcAft>
-                <a:spcPts val="800"/>
-              </a:spcAft>
-              <a:defRPr sz="1300">
-                <a:solidFill>
-                  <a:srgbClr val="F0F6FC"/>
-                </a:solidFill>
-              </a:defRPr>
-            </a:pPr>
-            <a:r>
-              <a:t>   Realistic PostgreSQL dump with decoy hashes and admin tables.</a:t>
-            </a:r>
-          </a:p>
-          <a:p>
-            <a:pPr>
-              <a:spcAft>
-                <a:spcPts val="800"/>
-              </a:spcAft>
-              <a:defRPr sz="1300">
-                <a:solidFill>
-                  <a:srgbClr val="F0F6FC"/>
-                </a:solidFill>
-              </a:defRPr>
-            </a:pPr>
-            <a:r>
-              <a:t>🪤 4. `admin_passwords.txt` &amp; `id_rsa`:</a:t>
-            </a:r>
-          </a:p>
-          <a:p>
-            <a:pPr>
-              <a:spcAft>
-                <a:spcPts val="800"/>
-              </a:spcAft>
-              <a:defRPr sz="1300">
-                <a:solidFill>
-                  <a:srgbClr val="F0F6FC"/>
-                </a:solidFill>
-              </a:defRPr>
-            </a:pPr>
-            <a:r>
-              <a:t>   Decoy IT infrastructure keys.</a:t>
-            </a:r>
-          </a:p>
-        </p:txBody>
-      </p:sp>
-      <p:sp>
-        <p:nvSpPr>
-          <p:cNvPr id="7" name="Rounded Rectangle 6"/>
-          <p:cNvSpPr/>
-          <p:nvPr/>
-        </p:nvSpPr>
-        <p:spPr>
-          <a:xfrm>
-            <a:off x="6217920" y="1645920"/>
-            <a:ext cx="5212080" cy="4572000"/>
-          </a:xfrm>
-          <a:prstGeom prst="roundRect">
-            <a:avLst/>
-          </a:prstGeom>
-          <a:solidFill>
-            <a:srgbClr val="161B22"/>
-          </a:solidFill>
-          <a:ln w="19050">
-            <a:solidFill>
-              <a:srgbClr val="FF8C00"/>
-            </a:solidFill>
-          </a:ln>
-        </p:spPr>
-        <p:style>
-          <a:lnRef idx="1">
-            <a:schemeClr val="accent1"/>
-          </a:lnRef>
-          <a:fillRef idx="3">
-            <a:schemeClr val="accent1"/>
-          </a:fillRef>
-          <a:effectRef idx="2">
-            <a:schemeClr val="accent1"/>
-          </a:effectRef>
-          <a:fontRef idx="minor">
-            <a:schemeClr val="lt1"/>
-          </a:fontRef>
-        </p:style>
-        <p:txBody>
-          <a:bodyPr rtlCol="0" anchor="ctr"/>
-          <a:lstStyle/>
-          <a:p>
-            <a:pPr algn="ctr"/>
-          </a:p>
-        </p:txBody>
-      </p:sp>
-      <p:sp>
-        <p:nvSpPr>
-          <p:cNvPr id="8" name="TextBox 7"/>
-          <p:cNvSpPr txBox="1"/>
-          <p:nvPr/>
-        </p:nvSpPr>
-        <p:spPr>
-          <a:xfrm>
-            <a:off x="6446520" y="1828800"/>
-            <a:ext cx="4754880" cy="4206240"/>
-          </a:xfrm>
-          <a:prstGeom prst="rect">
-            <a:avLst/>
-          </a:prstGeom>
-          <a:noFill/>
-        </p:spPr>
-        <p:txBody>
-          <a:bodyPr wrap="square">
-            <a:spAutoFit/>
-          </a:bodyPr>
-          <a:lstStyle/>
-          <a:p>
-            <a:pPr>
-              <a:spcAft>
-                <a:spcPts val="1200"/>
-              </a:spcAft>
-              <a:defRPr sz="1800" b="1">
-                <a:solidFill>
-                  <a:srgbClr val="FF8C00"/>
-                </a:solidFill>
-              </a:defRPr>
-            </a:pPr>
-            <a:r>
-              <a:t>Filesystem Watchdog Monitoring</a:t>
-            </a:r>
-          </a:p>
-          <a:p>
-            <a:pPr>
-              <a:spcAft>
-                <a:spcPts val="800"/>
-              </a:spcAft>
-              <a:defRPr sz="1300">
-                <a:solidFill>
-                  <a:srgbClr val="F0F6FC"/>
-                </a:solidFill>
-              </a:defRPr>
-            </a:pPr>
-            <a:r>
-              <a:t>👁️ Real-time Filesystem Listener:</a:t>
-            </a:r>
-          </a:p>
-          <a:p>
-            <a:pPr>
-              <a:spcAft>
-                <a:spcPts val="800"/>
-              </a:spcAft>
-              <a:defRPr sz="1300">
-                <a:solidFill>
-                  <a:srgbClr val="F0F6FC"/>
-                </a:solidFill>
-              </a:defRPr>
-            </a:pPr>
-            <a:r>
-              <a:t>   Built on Python's `watchdog` daemon running in background.</a:t>
-            </a:r>
-          </a:p>
-          <a:p>
-            <a:pPr>
-              <a:spcAft>
-                <a:spcPts val="800"/>
-              </a:spcAft>
-              <a:defRPr sz="1300">
-                <a:solidFill>
-                  <a:srgbClr val="F0F6FC"/>
-                </a:solidFill>
-              </a:defRPr>
-            </a:pPr>
-            <a:r>
-              <a:t>⚡ Touch Detection:</a:t>
-            </a:r>
-          </a:p>
-          <a:p>
-            <a:pPr>
-              <a:spcAft>
-                <a:spcPts val="800"/>
-              </a:spcAft>
-              <a:defRPr sz="1300">
-                <a:solidFill>
-                  <a:srgbClr val="F0F6FC"/>
-                </a:solidFill>
-              </a:defRPr>
-            </a:pPr>
-            <a:r>
-              <a:t>   Monitors file read, open, and modify system calls.</a:t>
-            </a:r>
-          </a:p>
-          <a:p>
-            <a:pPr>
-              <a:spcAft>
-                <a:spcPts val="800"/>
-              </a:spcAft>
-              <a:defRPr sz="1300">
-                <a:solidFill>
-                  <a:srgbClr val="F0F6FC"/>
-                </a:solidFill>
-              </a:defRPr>
-            </a:pPr>
-            <a:r>
-              <a:t>🔄 Dual Pipeline Dispatch:</a:t>
-            </a:r>
-          </a:p>
-          <a:p>
-            <a:pPr>
-              <a:spcAft>
-                <a:spcPts val="800"/>
-              </a:spcAft>
-              <a:defRPr sz="1300">
-                <a:solidFill>
-                  <a:srgbClr val="F0F6FC"/>
-                </a:solidFill>
-              </a:defRPr>
-            </a:pPr>
-            <a:r>
-              <a:t>   1. Writes high-priority record to `honeytoken_triggers` table.</a:t>
-            </a:r>
-          </a:p>
-          <a:p>
-            <a:pPr>
-              <a:spcAft>
-                <a:spcPts val="800"/>
-              </a:spcAft>
-              <a:defRPr sz="1300">
-                <a:solidFill>
-                  <a:srgbClr val="F0F6FC"/>
-                </a:solidFill>
-              </a:defRPr>
-            </a:pPr>
-            <a:r>
-              <a:t>   2. Logs event to `events` table with MITRE technique T1083.</a:t>
-            </a:r>
-          </a:p>
-          <a:p>
-            <a:pPr>
-              <a:spcAft>
-                <a:spcPts val="800"/>
-              </a:spcAft>
-              <a:defRPr sz="1300">
-                <a:solidFill>
-                  <a:srgbClr val="F0F6FC"/>
-                </a:solidFill>
-              </a:defRPr>
-            </a:pPr>
-            <a:r>
-              <a:t>   3. Immediately triggers +25 points score update.</a:t>
-            </a:r>
-          </a:p>
-        </p:txBody>
-      </p:sp>
-    </p:spTree>
-  </p:cSld>
-  <p:clrMapOvr>
-    <a:masterClrMapping/>
-  </p:clrMapOvr>
-</p:sld>
-</file>
-
-<file path=ppt/slides/slide9.xml><?xml version="1.0" encoding="utf-8"?>
-<p:sld xmlns:a="http://schemas.openxmlformats.org/drawingml/2006/main" xmlns:p="http://schemas.openxmlformats.org/presentationml/2006/main" xmlns:r="http://schemas.openxmlformats.org/officeDocument/2006/relationships">
-  <p:cSld>
-    <p:spTree>
-      <p:nvGrpSpPr>
-        <p:cNvPr id="1" name=""/>
-        <p:cNvGrpSpPr/>
-        <p:nvPr/>
-      </p:nvGrpSpPr>
-      <p:grpSpPr/>
-      <p:sp>
-        <p:nvSpPr>
-          <p:cNvPr id="2" name="Rectangle 1"/>
-          <p:cNvSpPr/>
-          <p:nvPr/>
-        </p:nvSpPr>
-        <p:spPr>
-          <a:xfrm>
-            <a:off x="0" y="0"/>
-            <a:ext cx="12191695" cy="6858000"/>
-          </a:xfrm>
-          <a:prstGeom prst="rect">
-            <a:avLst/>
-          </a:prstGeom>
-          <a:solidFill>
-            <a:srgbClr val="0D1117"/>
-          </a:solidFill>
-          <a:ln>
-            <a:noFill/>
-          </a:ln>
-        </p:spPr>
-        <p:style>
-          <a:lnRef idx="1">
-            <a:schemeClr val="accent1"/>
-          </a:lnRef>
-          <a:fillRef idx="3">
-            <a:schemeClr val="accent1"/>
-          </a:fillRef>
-          <a:effectRef idx="2">
-            <a:schemeClr val="accent1"/>
-          </a:effectRef>
-          <a:fontRef idx="minor">
-            <a:schemeClr val="lt1"/>
-          </a:fontRef>
-        </p:style>
-        <p:txBody>
-          <a:bodyPr rtlCol="0" anchor="ctr"/>
-          <a:lstStyle/>
-          <a:p>
-            <a:pPr algn="ctr"/>
-          </a:p>
-        </p:txBody>
-      </p:sp>
-      <p:sp>
-        <p:nvSpPr>
-          <p:cNvPr id="3" name="TextBox 2"/>
-          <p:cNvSpPr txBox="1"/>
-          <p:nvPr/>
-        </p:nvSpPr>
-        <p:spPr>
-          <a:xfrm>
-            <a:off x="731520" y="365760"/>
-            <a:ext cx="10698480" cy="365760"/>
-          </a:xfrm>
-          <a:prstGeom prst="rect">
-            <a:avLst/>
-          </a:prstGeom>
-          <a:noFill/>
-        </p:spPr>
-        <p:txBody>
-          <a:bodyPr wrap="square">
-            <a:spAutoFit/>
-          </a:bodyPr>
-          <a:lstStyle/>
-          <a:p>
-            <a:pPr>
-              <a:defRPr sz="1100" b="1">
-                <a:solidFill>
-                  <a:srgbClr val="00D4FF"/>
-                </a:solidFill>
-              </a:defRPr>
-            </a:pPr>
-            <a:r>
-              <a:t>08 / THREAT INTELLIGENCE</a:t>
-            </a:r>
-          </a:p>
-        </p:txBody>
-      </p:sp>
-      <p:sp>
-        <p:nvSpPr>
-          <p:cNvPr id="4" name="TextBox 3"/>
-          <p:cNvSpPr txBox="1"/>
-          <p:nvPr/>
-        </p:nvSpPr>
-        <p:spPr>
-          <a:xfrm>
-            <a:off x="731520" y="685800"/>
-            <a:ext cx="10698480" cy="731520"/>
-          </a:xfrm>
-          <a:prstGeom prst="rect">
-            <a:avLst/>
-          </a:prstGeom>
-          <a:noFill/>
-        </p:spPr>
-        <p:txBody>
-          <a:bodyPr wrap="square">
-            <a:spAutoFit/>
-          </a:bodyPr>
-          <a:lstStyle/>
-          <a:p>
-            <a:pPr>
-              <a:defRPr sz="2600" b="1">
-                <a:solidFill>
-                  <a:srgbClr val="F0F6FC"/>
-                </a:solidFill>
-              </a:defRPr>
-            </a:pPr>
-            <a:r>
-              <a:t>MITRE ATT&amp;CK Enterprise Framework Integration</a:t>
-            </a:r>
-          </a:p>
-        </p:txBody>
-      </p:sp>
-      <p:sp>
-        <p:nvSpPr>
-          <p:cNvPr id="5" name="Rounded Rectangle 4"/>
-          <p:cNvSpPr/>
-          <p:nvPr/>
-        </p:nvSpPr>
-        <p:spPr>
-          <a:xfrm>
-            <a:off x="731520" y="1645920"/>
-            <a:ext cx="10698480" cy="4572000"/>
-          </a:xfrm>
-          <a:prstGeom prst="roundRect">
-            <a:avLst/>
-          </a:prstGeom>
-          <a:solidFill>
-            <a:srgbClr val="161B22"/>
-          </a:solidFill>
-          <a:ln w="19050">
-            <a:solidFill>
-              <a:srgbClr val="00D4FF"/>
-            </a:solidFill>
-          </a:ln>
-        </p:spPr>
-        <p:style>
-          <a:lnRef idx="1">
-            <a:schemeClr val="accent1"/>
-          </a:lnRef>
-          <a:fillRef idx="3">
-            <a:schemeClr val="accent1"/>
-          </a:fillRef>
-          <a:effectRef idx="2">
-            <a:schemeClr val="accent1"/>
-          </a:effectRef>
-          <a:fontRef idx="minor">
-            <a:schemeClr val="lt1"/>
-          </a:fontRef>
-        </p:style>
-        <p:txBody>
-          <a:bodyPr rtlCol="0" anchor="ctr"/>
-          <a:lstStyle/>
-          <a:p>
-            <a:pPr algn="ctr"/>
-          </a:p>
-        </p:txBody>
-      </p:sp>
-      <p:sp>
-        <p:nvSpPr>
-          <p:cNvPr id="6" name="TextBox 5"/>
-          <p:cNvSpPr txBox="1"/>
-          <p:nvPr/>
-        </p:nvSpPr>
-        <p:spPr>
-          <a:xfrm>
-            <a:off x="960120" y="1828800"/>
-            <a:ext cx="10241280" cy="4206240"/>
-          </a:xfrm>
-          <a:prstGeom prst="rect">
-            <a:avLst/>
-          </a:prstGeom>
-          <a:noFill/>
-        </p:spPr>
-        <p:txBody>
-          <a:bodyPr wrap="square">
-            <a:spAutoFit/>
-          </a:bodyPr>
-          <a:lstStyle/>
-          <a:p>
-            <a:pPr>
-              <a:spcAft>
-                <a:spcPts val="1200"/>
-              </a:spcAft>
-              <a:defRPr sz="1800" b="1">
-                <a:solidFill>
-                  <a:srgbClr val="00D4FF"/>
-                </a:solidFill>
-              </a:defRPr>
-            </a:pPr>
-            <a:r>
-              <a:t>Mapped Techniques &amp; Adversary Tactics</a:t>
-            </a:r>
-          </a:p>
-          <a:p>
-            <a:pPr>
-              <a:spcAft>
-                <a:spcPts val="800"/>
-              </a:spcAft>
-              <a:defRPr sz="1300">
-                <a:solidFill>
-                  <a:srgbClr val="F0F6FC"/>
-                </a:solidFill>
-              </a:defRPr>
-            </a:pPr>
-            <a:r>
-              <a:t>📌 T1046 (Network Service Scanning) ➔ Initial port scanning across ports 8080, 2222, 2121</a:t>
-            </a:r>
-          </a:p>
-          <a:p>
-            <a:pPr>
-              <a:spcAft>
-                <a:spcPts val="800"/>
-              </a:spcAft>
-              <a:defRPr sz="1300">
-                <a:solidFill>
-                  <a:srgbClr val="F0F6FC"/>
-                </a:solidFill>
-              </a:defRPr>
-            </a:pPr>
-            <a:r>
-              <a:t>📌 T1110 (Brute Force) ➔ Repeated password guessing attempts on SSH and HTTP admin forms</a:t>
-            </a:r>
-          </a:p>
-          <a:p>
-            <a:pPr>
-              <a:spcAft>
-                <a:spcPts val="800"/>
-              </a:spcAft>
-              <a:defRPr sz="1300">
-                <a:solidFill>
-                  <a:srgbClr val="F0F6FC"/>
-                </a:solidFill>
-              </a:defRPr>
-            </a:pPr>
-            <a:r>
-              <a:t>📌 T1078.001 (Default Accounts) ➔ Testing default credentials (root/toor, admin/admin, sa)</a:t>
-            </a:r>
-          </a:p>
-          <a:p>
-            <a:pPr>
-              <a:spcAft>
-                <a:spcPts val="800"/>
-              </a:spcAft>
-              <a:defRPr sz="1300">
-                <a:solidFill>
-                  <a:srgbClr val="F0F6FC"/>
-                </a:solidFill>
-              </a:defRPr>
-            </a:pPr>
-            <a:r>
-              <a:t>📌 T1552.001 (Credentials in Files) ➔ Targeted harvesting of `/.env` and configuration tokens</a:t>
-            </a:r>
-          </a:p>
-          <a:p>
-            <a:pPr>
-              <a:spcAft>
-                <a:spcPts val="800"/>
-              </a:spcAft>
-              <a:defRPr sz="1300">
-                <a:solidFill>
-                  <a:srgbClr val="F0F6FC"/>
-                </a:solidFill>
-              </a:defRPr>
-            </a:pPr>
-            <a:r>
-              <a:t>📌 T1033 (System Owner/User Discovery) ➔ Attacker running `whoami` and `id` in interactive shell</a:t>
-            </a:r>
-          </a:p>
-          <a:p>
-            <a:pPr>
-              <a:spcAft>
-                <a:spcPts val="800"/>
-              </a:spcAft>
-              <a:defRPr sz="1300">
-                <a:solidFill>
-                  <a:srgbClr val="F0F6FC"/>
-                </a:solidFill>
-              </a:defRPr>
-            </a:pPr>
-            <a:r>
-              <a:t>📌 T1087.001 (Local Account Discovery) ➔ Attacker running `cat /etc/passwd` to enumerate user accounts</a:t>
-            </a:r>
-          </a:p>
-          <a:p>
-            <a:pPr>
-              <a:spcAft>
-                <a:spcPts val="800"/>
-              </a:spcAft>
-              <a:defRPr sz="1300">
-                <a:solidFill>
-                  <a:srgbClr val="F0F6FC"/>
-                </a:solidFill>
-              </a:defRPr>
-            </a:pPr>
-            <a:r>
-              <a:t>📌 T1005 (Data from Local System) ➔ Exfiltrating `credentials.xlsx` via FTP decoy download</a:t>
-            </a:r>
-          </a:p>
-          <a:p>
-            <a:pPr>
-              <a:spcAft>
-                <a:spcPts val="800"/>
-              </a:spcAft>
-              <a:defRPr sz="1300">
-                <a:solidFill>
-                  <a:srgbClr val="F0F6FC"/>
-                </a:solidFill>
-              </a:defRPr>
-            </a:pPr>
-            <a:r>
-              <a:t>📌 T1083 (File &amp; Directory Discovery) ➔ Accessing planted filesystem honeytokens in `/bait/`</a:t>
+              <a:t>Project Lead: Jaskaran Bandral   •   Co-Developer: Relish Sharma</a:t>
+            </a:r>
+            <a:br/>
+            <a:r>
+              <a:t>Department of Computer Science &amp; Engineering (Cybersecurity Specialization)</a:t>
+            </a:r>
+            <a:br/>
+            <a:br/>
+            <a:r>
+              <a:t>We are now open for Evaluator Questions &amp; Live Defense!</a:t>
             </a:r>
           </a:p>
         </p:txBody>
